--- a/docs/customer-presentation.pptx
+++ b/docs/customer-presentation.pptx
@@ -3180,7 +3180,7 @@
                 </a:solidFill>
                 <a:latin typeface="Microsoft YaHei"/>
               </a:rPr>
-              <a:t>RAGPro ??????????????</a:t>
+              <a:t>RAGPro 智能知识问答与知识库管理系统</a:t>
             </a:r>
           </a:p>
         </p:txBody>
@@ -3215,7 +3215,7 @@
                 </a:solidFill>
                 <a:latin typeface="Microsoft YaHei"/>
               </a:rPr>
-              <a:t>????? | ???????????????????</a:t>
+              <a:t>客户讲解版 | 知识上传、权限控制、智能问答、审计运维</a:t>
             </a:r>
           </a:p>
         </p:txBody>
@@ -3295,7 +3295,7 @@
                 </a:solidFill>
                 <a:latin typeface="Microsoft YaHei"/>
               </a:rPr>
-              <a:t>????</a:t>
+              <a:t>核心定位</a:t>
             </a:r>
           </a:p>
         </p:txBody>
@@ -3373,7 +3373,7 @@
                 </a:solidFill>
                 <a:latin typeface="Microsoft YaHei"/>
               </a:rPr>
-              <a:t>???????????????????</a:t>
+              <a:t>面向企业知识库的智能问答系统</a:t>
             </a:r>
           </a:p>
         </p:txBody>
@@ -3451,7 +3451,7 @@
                 </a:solidFill>
                 <a:latin typeface="Microsoft YaHei"/>
               </a:rPr>
-              <a:t>???????????????</a:t>
+              <a:t>支持知识上传、索引重建、权限控制和问答追溯</a:t>
             </a:r>
           </a:p>
         </p:txBody>
@@ -3529,7 +3529,7 @@
                 </a:solidFill>
                 <a:latin typeface="Microsoft YaHei"/>
               </a:rPr>
-              <a:t>????????????????</a:t>
+              <a:t>适合内部资料查询、业务知识问答、制度/文档辅助检索</a:t>
             </a:r>
           </a:p>
         </p:txBody>
@@ -3564,7 +3564,7 @@
                 </a:solidFill>
                 <a:latin typeface="Microsoft YaHei"/>
               </a:rPr>
-              <a:t>??????</a:t>
+              <a:t>客户讲解草稿</a:t>
             </a:r>
           </a:p>
         </p:txBody>
@@ -3724,8 +3724,8 @@
         </p:nvSpPr>
         <p:spPr>
           <a:xfrm>
-            <a:off x="594360" y="502920"/>
-            <a:ext cx="8138160" cy="438912"/>
+            <a:off x="594360" y="512064"/>
+            <a:ext cx="8595360" cy="438912"/>
           </a:xfrm>
           <a:prstGeom prst="rect">
             <a:avLst/>
@@ -3746,7 +3746,7 @@
                 </a:solidFill>
                 <a:latin typeface="Microsoft YaHei"/>
               </a:rPr>
-              <a:t>???????????</a:t>
+              <a:t>管理员如何判断系统是否健康</a:t>
             </a:r>
           </a:p>
         </p:txBody>
@@ -3759,8 +3759,8 @@
         </p:nvSpPr>
         <p:spPr>
           <a:xfrm>
-            <a:off x="612648" y="950976"/>
-            <a:ext cx="8046720" cy="292608"/>
+            <a:off x="11018520" y="512064"/>
+            <a:ext cx="685800" cy="320040"/>
           </a:xfrm>
           <a:prstGeom prst="rect">
             <a:avLst/>
@@ -3773,15 +3773,15 @@
           </a:bodyPr>
           <a:lstStyle/>
           <a:p>
-            <a:pPr algn="l"/>
-            <a:r>
-              <a:rPr sz="1250" b="0">
+            <a:pPr algn="r"/>
+            <a:r>
+              <a:rPr sz="1400" b="1">
                 <a:solidFill>
                   <a:srgbClr val="657684"/>
                 </a:solidFill>
                 <a:latin typeface="Microsoft YaHei"/>
               </a:rPr>
-              <a:t>?????????</a:t>
+              <a:t>10</a:t>
             </a:r>
           </a:p>
         </p:txBody>
@@ -3794,43 +3794,8 @@
         </p:nvSpPr>
         <p:spPr>
           <a:xfrm>
-            <a:off x="11018520" y="502920"/>
-            <a:ext cx="685800" cy="320040"/>
-          </a:xfrm>
-          <a:prstGeom prst="rect">
-            <a:avLst/>
-          </a:prstGeom>
-          <a:noFill/>
-        </p:spPr>
-        <p:txBody>
-          <a:bodyPr wrap="square" anchor="t">
-            <a:spAutoFit/>
-          </a:bodyPr>
-          <a:lstStyle/>
-          <a:p>
-            <a:pPr algn="r"/>
-            <a:r>
-              <a:rPr sz="1400" b="1">
-                <a:solidFill>
-                  <a:srgbClr val="657684"/>
-                </a:solidFill>
-                <a:latin typeface="Microsoft YaHei"/>
-              </a:rPr>
-              <a:t>10</a:t>
-            </a:r>
-          </a:p>
-        </p:txBody>
-      </p:sp>
-      <p:sp>
-        <p:nvSpPr>
-          <p:cNvPr id="7" name="TextBox 6"/>
-          <p:cNvSpPr txBox="1"/>
-          <p:nvPr/>
-        </p:nvSpPr>
-        <p:spPr>
-          <a:xfrm>
-            <a:off x="713232" y="1481328"/>
-            <a:ext cx="5532120" cy="4297680"/>
+            <a:off x="713232" y="1417320"/>
+            <a:ext cx="5532120" cy="4389120"/>
           </a:xfrm>
           <a:prstGeom prst="rect">
             <a:avLst/>
@@ -3855,7 +3820,7 @@
               </a:defRPr>
             </a:pPr>
             <a:r>
-              <a:t>???????????????</a:t>
+              <a:t>/health 用于快速判断系统是否可用</a:t>
             </a:r>
           </a:p>
           <a:p>
@@ -3871,7 +3836,7 @@
               </a:defRPr>
             </a:pPr>
             <a:r>
-              <a:t>??????????????</a:t>
+              <a:t>诊断能力可检查 MySQL、Redis、Milvus、Ollama 等依赖状态</a:t>
             </a:r>
           </a:p>
           <a:p>
@@ -3887,7 +3852,7 @@
               </a:defRPr>
             </a:pPr>
             <a:r>
-              <a:t>????????????????</a:t>
+              <a:t>当检索或生成依赖不可用时，系统会暴露状态信息</a:t>
             </a:r>
           </a:p>
           <a:p>
@@ -3903,36 +3868,20 @@
               </a:defRPr>
             </a:pPr>
             <a:r>
-              <a:t>???????????????</a:t>
-            </a:r>
-          </a:p>
-          <a:p>
-            <a:pPr>
-              <a:spcAft>
-                <a:spcPts val="1000"/>
-              </a:spcAft>
-              <a:defRPr sz="1700">
-                <a:solidFill>
-                  <a:srgbClr val="26343F"/>
-                </a:solidFill>
-                <a:latin typeface="Microsoft YaHei"/>
-              </a:defRPr>
-            </a:pPr>
-            <a:r>
-              <a:t>???????????????????</a:t>
-            </a:r>
-          </a:p>
-        </p:txBody>
-      </p:sp>
-      <p:sp>
-        <p:nvSpPr>
-          <p:cNvPr id="8" name="Rounded Rectangle 7"/>
+              <a:t>管理员可以根据状态定位是服务问题、知识源问题还是权限问题</a:t>
+            </a:r>
+          </a:p>
+        </p:txBody>
+      </p:sp>
+      <p:sp>
+        <p:nvSpPr>
+          <p:cNvPr id="7" name="Rounded Rectangle 6"/>
           <p:cNvSpPr/>
           <p:nvPr/>
         </p:nvSpPr>
         <p:spPr>
           <a:xfrm>
-            <a:off x="6629400" y="1481328"/>
+            <a:off x="6629400" y="1417320"/>
             <a:ext cx="4709160" cy="4389120"/>
           </a:xfrm>
           <a:prstGeom prst="roundRect">
@@ -3971,13 +3920,13 @@
       </p:sp>
       <p:sp>
         <p:nvSpPr>
-          <p:cNvPr id="9" name="TextBox 8"/>
+          <p:cNvPr id="8" name="TextBox 7"/>
           <p:cNvSpPr txBox="1"/>
           <p:nvPr/>
         </p:nvSpPr>
         <p:spPr>
           <a:xfrm>
-            <a:off x="6949440" y="1773936"/>
+            <a:off x="6949440" y="1709928"/>
             <a:ext cx="4069080" cy="310896"/>
           </a:xfrm>
           <a:prstGeom prst="rect">
@@ -3999,27 +3948,27 @@
                 </a:solidFill>
                 <a:latin typeface="Microsoft YaHei"/>
               </a:rPr>
-              <a:t>????</a:t>
-            </a:r>
-          </a:p>
-        </p:txBody>
-      </p:sp>
-      <p:sp>
-        <p:nvSpPr>
-          <p:cNvPr id="10" name="Oval 9"/>
+              <a:t>讲解提示</a:t>
+            </a:r>
+          </a:p>
+        </p:txBody>
+      </p:sp>
+      <p:sp>
+        <p:nvSpPr>
+          <p:cNvPr id="9" name="Oval 8"/>
           <p:cNvSpPr/>
           <p:nvPr/>
         </p:nvSpPr>
         <p:spPr>
           <a:xfrm>
-            <a:off x="6958584" y="2350008"/>
+            <a:off x="6958584" y="2286000"/>
             <a:ext cx="146304" cy="146304"/>
           </a:xfrm>
           <a:prstGeom prst="ellipse">
             <a:avLst/>
           </a:prstGeom>
           <a:solidFill>
-            <a:srgbClr val="EC8B40"/>
+            <a:srgbClr val="409669"/>
           </a:solidFill>
           <a:ln>
             <a:noFill/>
@@ -4049,13 +3998,13 @@
       </p:sp>
       <p:sp>
         <p:nvSpPr>
-          <p:cNvPr id="11" name="TextBox 10"/>
+          <p:cNvPr id="10" name="TextBox 9"/>
           <p:cNvSpPr txBox="1"/>
           <p:nvPr/>
         </p:nvSpPr>
         <p:spPr>
           <a:xfrm>
-            <a:off x="7223760" y="2286000"/>
+            <a:off x="7223760" y="2221992"/>
             <a:ext cx="3794760" cy="411480"/>
           </a:xfrm>
           <a:prstGeom prst="rect">
@@ -4077,319 +4026,7 @@
                 </a:solidFill>
                 <a:latin typeface="Microsoft YaHei"/>
               </a:rPr>
-              <a:t>?? /users</a:t>
-            </a:r>
-          </a:p>
-        </p:txBody>
-      </p:sp>
-      <p:sp>
-        <p:nvSpPr>
-          <p:cNvPr id="12" name="Oval 11"/>
-          <p:cNvSpPr/>
-          <p:nvPr/>
-        </p:nvSpPr>
-        <p:spPr>
-          <a:xfrm>
-            <a:off x="6958584" y="3008376"/>
-            <a:ext cx="146304" cy="146304"/>
-          </a:xfrm>
-          <a:prstGeom prst="ellipse">
-            <a:avLst/>
-          </a:prstGeom>
-          <a:solidFill>
-            <a:srgbClr val="EC8B40"/>
-          </a:solidFill>
-          <a:ln>
-            <a:noFill/>
-          </a:ln>
-        </p:spPr>
-        <p:style>
-          <a:lnRef idx="1">
-            <a:schemeClr val="accent1"/>
-          </a:lnRef>
-          <a:fillRef idx="3">
-            <a:schemeClr val="accent1"/>
-          </a:fillRef>
-          <a:effectRef idx="2">
-            <a:schemeClr val="accent1"/>
-          </a:effectRef>
-          <a:fontRef idx="minor">
-            <a:schemeClr val="lt1"/>
-          </a:fontRef>
-        </p:style>
-        <p:txBody>
-          <a:bodyPr rtlCol="0" anchor="ctr"/>
-          <a:lstStyle/>
-          <a:p>
-            <a:pPr algn="ctr"/>
-          </a:p>
-        </p:txBody>
-      </p:sp>
-      <p:sp>
-        <p:nvSpPr>
-          <p:cNvPr id="13" name="TextBox 12"/>
-          <p:cNvSpPr txBox="1"/>
-          <p:nvPr/>
-        </p:nvSpPr>
-        <p:spPr>
-          <a:xfrm>
-            <a:off x="7223760" y="2944368"/>
-            <a:ext cx="3794760" cy="411480"/>
-          </a:xfrm>
-          <a:prstGeom prst="rect">
-            <a:avLst/>
-          </a:prstGeom>
-          <a:noFill/>
-        </p:spPr>
-        <p:txBody>
-          <a:bodyPr wrap="square" anchor="t">
-            <a:spAutoFit/>
-          </a:bodyPr>
-          <a:lstStyle/>
-          <a:p>
-            <a:pPr algn="l"/>
-            <a:r>
-              <a:rPr sz="1250" b="0">
-                <a:solidFill>
-                  <a:srgbClr val="26343F"/>
-                </a:solidFill>
-                <a:latin typeface="Microsoft YaHei"/>
-              </a:rPr>
-              <a:t>??????</a:t>
-            </a:r>
-          </a:p>
-        </p:txBody>
-      </p:sp>
-      <p:sp>
-        <p:nvSpPr>
-          <p:cNvPr id="14" name="Oval 13"/>
-          <p:cNvSpPr/>
-          <p:nvPr/>
-        </p:nvSpPr>
-        <p:spPr>
-          <a:xfrm>
-            <a:off x="6958584" y="3666744"/>
-            <a:ext cx="146304" cy="146304"/>
-          </a:xfrm>
-          <a:prstGeom prst="ellipse">
-            <a:avLst/>
-          </a:prstGeom>
-          <a:solidFill>
-            <a:srgbClr val="EC8B40"/>
-          </a:solidFill>
-          <a:ln>
-            <a:noFill/>
-          </a:ln>
-        </p:spPr>
-        <p:style>
-          <a:lnRef idx="1">
-            <a:schemeClr val="accent1"/>
-          </a:lnRef>
-          <a:fillRef idx="3">
-            <a:schemeClr val="accent1"/>
-          </a:fillRef>
-          <a:effectRef idx="2">
-            <a:schemeClr val="accent1"/>
-          </a:effectRef>
-          <a:fontRef idx="minor">
-            <a:schemeClr val="lt1"/>
-          </a:fontRef>
-        </p:style>
-        <p:txBody>
-          <a:bodyPr rtlCol="0" anchor="ctr"/>
-          <a:lstStyle/>
-          <a:p>
-            <a:pPr algn="ctr"/>
-          </a:p>
-        </p:txBody>
-      </p:sp>
-      <p:sp>
-        <p:nvSpPr>
-          <p:cNvPr id="15" name="TextBox 14"/>
-          <p:cNvSpPr txBox="1"/>
-          <p:nvPr/>
-        </p:nvSpPr>
-        <p:spPr>
-          <a:xfrm>
-            <a:off x="7223760" y="3602736"/>
-            <a:ext cx="3794760" cy="411480"/>
-          </a:xfrm>
-          <a:prstGeom prst="rect">
-            <a:avLst/>
-          </a:prstGeom>
-          <a:noFill/>
-        </p:spPr>
-        <p:txBody>
-          <a:bodyPr wrap="square" anchor="t">
-            <a:spAutoFit/>
-          </a:bodyPr>
-          <a:lstStyle/>
-          <a:p>
-            <a:pPr algn="l"/>
-            <a:r>
-              <a:rPr sz="1250" b="0">
-                <a:solidFill>
-                  <a:srgbClr val="26343F"/>
-                </a:solidFill>
-                <a:latin typeface="Microsoft YaHei"/>
-              </a:rPr>
-              <a:t>?? /users/access</a:t>
-            </a:r>
-          </a:p>
-        </p:txBody>
-      </p:sp>
-      <p:sp>
-        <p:nvSpPr>
-          <p:cNvPr id="16" name="Oval 15"/>
-          <p:cNvSpPr/>
-          <p:nvPr/>
-        </p:nvSpPr>
-        <p:spPr>
-          <a:xfrm>
-            <a:off x="6958584" y="4325112"/>
-            <a:ext cx="146304" cy="146304"/>
-          </a:xfrm>
-          <a:prstGeom prst="ellipse">
-            <a:avLst/>
-          </a:prstGeom>
-          <a:solidFill>
-            <a:srgbClr val="EC8B40"/>
-          </a:solidFill>
-          <a:ln>
-            <a:noFill/>
-          </a:ln>
-        </p:spPr>
-        <p:style>
-          <a:lnRef idx="1">
-            <a:schemeClr val="accent1"/>
-          </a:lnRef>
-          <a:fillRef idx="3">
-            <a:schemeClr val="accent1"/>
-          </a:fillRef>
-          <a:effectRef idx="2">
-            <a:schemeClr val="accent1"/>
-          </a:effectRef>
-          <a:fontRef idx="minor">
-            <a:schemeClr val="lt1"/>
-          </a:fontRef>
-        </p:style>
-        <p:txBody>
-          <a:bodyPr rtlCol="0" anchor="ctr"/>
-          <a:lstStyle/>
-          <a:p>
-            <a:pPr algn="ctr"/>
-          </a:p>
-        </p:txBody>
-      </p:sp>
-      <p:sp>
-        <p:nvSpPr>
-          <p:cNvPr id="17" name="TextBox 16"/>
-          <p:cNvSpPr txBox="1"/>
-          <p:nvPr/>
-        </p:nvSpPr>
-        <p:spPr>
-          <a:xfrm>
-            <a:off x="7223760" y="4261104"/>
-            <a:ext cx="3794760" cy="411480"/>
-          </a:xfrm>
-          <a:prstGeom prst="rect">
-            <a:avLst/>
-          </a:prstGeom>
-          <a:noFill/>
-        </p:spPr>
-        <p:txBody>
-          <a:bodyPr wrap="square" anchor="t">
-            <a:spAutoFit/>
-          </a:bodyPr>
-          <a:lstStyle/>
-          <a:p>
-            <a:pPr algn="l"/>
-            <a:r>
-              <a:rPr sz="1250" b="0">
-                <a:solidFill>
-                  <a:srgbClr val="26343F"/>
-                </a:solidFill>
-                <a:latin typeface="Microsoft YaHei"/>
-              </a:rPr>
-              <a:t>???????</a:t>
-            </a:r>
-          </a:p>
-        </p:txBody>
-      </p:sp>
-      <p:sp>
-        <p:nvSpPr>
-          <p:cNvPr id="18" name="Oval 17"/>
-          <p:cNvSpPr/>
-          <p:nvPr/>
-        </p:nvSpPr>
-        <p:spPr>
-          <a:xfrm>
-            <a:off x="6958584" y="4983480"/>
-            <a:ext cx="146304" cy="146304"/>
-          </a:xfrm>
-          <a:prstGeom prst="ellipse">
-            <a:avLst/>
-          </a:prstGeom>
-          <a:solidFill>
-            <a:srgbClr val="EC8B40"/>
-          </a:solidFill>
-          <a:ln>
-            <a:noFill/>
-          </a:ln>
-        </p:spPr>
-        <p:style>
-          <a:lnRef idx="1">
-            <a:schemeClr val="accent1"/>
-          </a:lnRef>
-          <a:fillRef idx="3">
-            <a:schemeClr val="accent1"/>
-          </a:fillRef>
-          <a:effectRef idx="2">
-            <a:schemeClr val="accent1"/>
-          </a:effectRef>
-          <a:fontRef idx="minor">
-            <a:schemeClr val="lt1"/>
-          </a:fontRef>
-        </p:style>
-        <p:txBody>
-          <a:bodyPr rtlCol="0" anchor="ctr"/>
-          <a:lstStyle/>
-          <a:p>
-            <a:pPr algn="ctr"/>
-          </a:p>
-        </p:txBody>
-      </p:sp>
-      <p:sp>
-        <p:nvSpPr>
-          <p:cNvPr id="19" name="TextBox 18"/>
-          <p:cNvSpPr txBox="1"/>
-          <p:nvPr/>
-        </p:nvSpPr>
-        <p:spPr>
-          <a:xfrm>
-            <a:off x="7223760" y="4919472"/>
-            <a:ext cx="3794760" cy="411480"/>
-          </a:xfrm>
-          <a:prstGeom prst="rect">
-            <a:avLst/>
-          </a:prstGeom>
-          <a:noFill/>
-        </p:spPr>
-        <p:txBody>
-          <a:bodyPr wrap="square" anchor="t">
-            <a:spAutoFit/>
-          </a:bodyPr>
-          <a:lstStyle/>
-          <a:p>
-            <a:pPr algn="l"/>
-            <a:r>
-              <a:rPr sz="1250" b="0">
-                <a:solidFill>
-                  <a:srgbClr val="26343F"/>
-                </a:solidFill>
-                <a:latin typeface="Microsoft YaHei"/>
-              </a:rPr>
-              <a:t>?? /users/audit</a:t>
+              <a:t>客户不一定需要看技术细节，但需要知道系统有健康检查和诊断入口。不要把内部服务参数讲太多，除非客户技术团队追问。</a:t>
             </a:r>
           </a:p>
         </p:txBody>
@@ -4514,8 +4151,8 @@
         </p:nvSpPr>
         <p:spPr>
           <a:xfrm>
-            <a:off x="594360" y="502920"/>
-            <a:ext cx="8138160" cy="438912"/>
+            <a:off x="594360" y="512064"/>
+            <a:ext cx="8595360" cy="438912"/>
           </a:xfrm>
           <a:prstGeom prst="rect">
             <a:avLst/>
@@ -4536,7 +4173,7 @@
                 </a:solidFill>
                 <a:latin typeface="Microsoft YaHei"/>
               </a:rPr>
-              <a:t>??????</a:t>
+              <a:t>一条完整演示线</a:t>
             </a:r>
           </a:p>
         </p:txBody>
@@ -4549,8 +4186,8 @@
         </p:nvSpPr>
         <p:spPr>
           <a:xfrm>
-            <a:off x="612648" y="950976"/>
-            <a:ext cx="8046720" cy="292608"/>
+            <a:off x="11018520" y="512064"/>
+            <a:ext cx="685800" cy="320040"/>
           </a:xfrm>
           <a:prstGeom prst="rect">
             <a:avLst/>
@@ -4563,15 +4200,15 @@
           </a:bodyPr>
           <a:lstStyle/>
           <a:p>
-            <a:pPr algn="l"/>
-            <a:r>
-              <a:rPr sz="1250" b="0">
+            <a:pPr algn="r"/>
+            <a:r>
+              <a:rPr sz="1400" b="1">
                 <a:solidFill>
                   <a:srgbClr val="657684"/>
                 </a:solidFill>
                 <a:latin typeface="Microsoft YaHei"/>
               </a:rPr>
-              <a:t>15 ????????</a:t>
+              <a:t>11</a:t>
             </a:r>
           </a:p>
         </p:txBody>
@@ -4584,43 +4221,8 @@
         </p:nvSpPr>
         <p:spPr>
           <a:xfrm>
-            <a:off x="11018520" y="502920"/>
-            <a:ext cx="685800" cy="320040"/>
-          </a:xfrm>
-          <a:prstGeom prst="rect">
-            <a:avLst/>
-          </a:prstGeom>
-          <a:noFill/>
-        </p:spPr>
-        <p:txBody>
-          <a:bodyPr wrap="square" anchor="t">
-            <a:spAutoFit/>
-          </a:bodyPr>
-          <a:lstStyle/>
-          <a:p>
-            <a:pPr algn="r"/>
-            <a:r>
-              <a:rPr sz="1400" b="1">
-                <a:solidFill>
-                  <a:srgbClr val="657684"/>
-                </a:solidFill>
-                <a:latin typeface="Microsoft YaHei"/>
-              </a:rPr>
-              <a:t>11</a:t>
-            </a:r>
-          </a:p>
-        </p:txBody>
-      </p:sp>
-      <p:sp>
-        <p:nvSpPr>
-          <p:cNvPr id="7" name="TextBox 6"/>
-          <p:cNvSpPr txBox="1"/>
-          <p:nvPr/>
-        </p:nvSpPr>
-        <p:spPr>
-          <a:xfrm>
-            <a:off x="713232" y="1481328"/>
-            <a:ext cx="5532120" cy="4297680"/>
+            <a:off x="713232" y="1417320"/>
+            <a:ext cx="5532120" cy="4389120"/>
           </a:xfrm>
           <a:prstGeom prst="rect">
             <a:avLst/>
@@ -4645,7 +4247,7 @@
               </a:defRPr>
             </a:pPr>
             <a:r>
-              <a:t>??????????????????</a:t>
+              <a:t>第一步：管理员登录，展示知识库和用户管理能力</a:t>
             </a:r>
           </a:p>
           <a:p>
@@ -4661,7 +4263,7 @@
               </a:defRPr>
             </a:pPr>
             <a:r>
-              <a:t>??????????????????</a:t>
+              <a:t>第二步：上传演示文档，展示上传进度和结果</a:t>
             </a:r>
           </a:p>
           <a:p>
@@ -4677,7 +4279,7 @@
               </a:defRPr>
             </a:pPr>
             <a:r>
-              <a:t>???????????????</a:t>
+              <a:t>第三步：普通用户登录，提出文档相关问题</a:t>
             </a:r>
           </a:p>
           <a:p>
@@ -4693,7 +4295,7 @@
               </a:defRPr>
             </a:pPr>
             <a:r>
-              <a:t>????????????</a:t>
+              <a:t>第四步：展示答案、引用、会话追问</a:t>
             </a:r>
           </a:p>
           <a:p>
@@ -4709,30 +4311,32 @@
               </a:defRPr>
             </a:pPr>
             <a:r>
-              <a:t>???????????????</a:t>
-            </a:r>
-          </a:p>
-        </p:txBody>
-      </p:sp>
-      <p:sp>
-        <p:nvSpPr>
-          <p:cNvPr id="8" name="Oval 7"/>
+              <a:t>第五步：回到管理员，展示权限和审计记录</a:t>
+            </a:r>
+          </a:p>
+        </p:txBody>
+      </p:sp>
+      <p:sp>
+        <p:nvSpPr>
+          <p:cNvPr id="7" name="Rounded Rectangle 6"/>
           <p:cNvSpPr/>
           <p:nvPr/>
         </p:nvSpPr>
         <p:spPr>
           <a:xfrm>
-            <a:off x="914400" y="2331720"/>
-            <a:ext cx="658368" cy="658368"/>
-          </a:xfrm>
-          <a:prstGeom prst="ellipse">
+            <a:off x="6629400" y="1417320"/>
+            <a:ext cx="4709160" cy="4389120"/>
+          </a:xfrm>
+          <a:prstGeom prst="roundRect">
             <a:avLst/>
           </a:prstGeom>
           <a:solidFill>
-            <a:srgbClr val="1877F2"/>
+            <a:srgbClr val="FFFFFF"/>
           </a:solidFill>
-          <a:ln>
-            <a:noFill/>
+          <a:ln w="12700">
+            <a:solidFill>
+              <a:srgbClr val="DAE2E8"/>
+            </a:solidFill>
           </a:ln>
         </p:spPr>
         <p:style>
@@ -4759,14 +4363,14 @@
       </p:sp>
       <p:sp>
         <p:nvSpPr>
-          <p:cNvPr id="9" name="TextBox 8"/>
+          <p:cNvPr id="8" name="TextBox 7"/>
           <p:cNvSpPr txBox="1"/>
           <p:nvPr/>
         </p:nvSpPr>
         <p:spPr>
           <a:xfrm>
-            <a:off x="1078992" y="2487168"/>
-            <a:ext cx="320040" cy="228600"/>
+            <a:off x="6949440" y="1709928"/>
+            <a:ext cx="4069080" cy="310896"/>
           </a:xfrm>
           <a:prstGeom prst="rect">
             <a:avLst/>
@@ -4779,395 +4383,29 @@
           </a:bodyPr>
           <a:lstStyle/>
           <a:p>
-            <a:pPr algn="ctr"/>
-            <a:r>
-              <a:rPr sz="1400" b="1">
-                <a:solidFill>
-                  <a:srgbClr val="FFFFFF"/>
+            <a:pPr algn="l"/>
+            <a:r>
+              <a:rPr sz="1500" b="1">
+                <a:solidFill>
+                  <a:srgbClr val="142B43"/>
                 </a:solidFill>
                 <a:latin typeface="Microsoft YaHei"/>
               </a:rPr>
-              <a:t>1</a:t>
-            </a:r>
-          </a:p>
-        </p:txBody>
-      </p:sp>
-      <p:sp>
-        <p:nvSpPr>
-          <p:cNvPr id="10" name="TextBox 9"/>
-          <p:cNvSpPr txBox="1"/>
-          <p:nvPr/>
-        </p:nvSpPr>
-        <p:spPr>
-          <a:xfrm>
-            <a:off x="594360" y="3154680"/>
-            <a:ext cx="1325880" cy="384048"/>
-          </a:xfrm>
-          <a:prstGeom prst="rect">
-            <a:avLst/>
-          </a:prstGeom>
-          <a:noFill/>
-        </p:spPr>
-        <p:txBody>
-          <a:bodyPr wrap="square" anchor="t">
-            <a:spAutoFit/>
-          </a:bodyPr>
-          <a:lstStyle/>
-          <a:p>
-            <a:pPr algn="ctr"/>
-            <a:r>
-              <a:rPr sz="1250" b="1">
-                <a:solidFill>
-                  <a:srgbClr val="26343F"/>
-                </a:solidFill>
-                <a:latin typeface="Microsoft YaHei"/>
-              </a:rPr>
-              <a:t>?????</a:t>
-            </a:r>
-          </a:p>
-        </p:txBody>
-      </p:sp>
-      <p:cxnSp>
-        <p:nvCxnSpPr>
-          <p:cNvPr id="11" name="Connector 10"/>
-          <p:cNvCxnSpPr/>
-          <p:nvPr/>
-        </p:nvCxnSpPr>
-        <p:spPr>
-          <a:xfrm>
-            <a:off x="1572768" y="2660904"/>
-            <a:ext cx="1490472" cy="0"/>
-          </a:xfrm>
-          <a:prstGeom prst="line">
-            <a:avLst/>
-          </a:prstGeom>
-          <a:ln w="27940">
-            <a:solidFill>
-              <a:srgbClr val="DAE2E8"/>
-            </a:solidFill>
-          </a:ln>
-        </p:spPr>
-        <p:style>
-          <a:lnRef idx="2">
-            <a:schemeClr val="accent1"/>
-          </a:lnRef>
-          <a:fillRef idx="0">
-            <a:schemeClr val="accent1"/>
-          </a:fillRef>
-          <a:effectRef idx="1">
-            <a:schemeClr val="accent1"/>
-          </a:effectRef>
-          <a:fontRef idx="minor">
-            <a:schemeClr val="tx1"/>
-          </a:fontRef>
-        </p:style>
-      </p:cxnSp>
-      <p:sp>
-        <p:nvSpPr>
-          <p:cNvPr id="12" name="Oval 11"/>
+              <a:t>讲解提示</a:t>
+            </a:r>
+          </a:p>
+        </p:txBody>
+      </p:sp>
+      <p:sp>
+        <p:nvSpPr>
+          <p:cNvPr id="9" name="Oval 8"/>
           <p:cNvSpPr/>
           <p:nvPr/>
         </p:nvSpPr>
         <p:spPr>
           <a:xfrm>
-            <a:off x="3063240" y="2331720"/>
-            <a:ext cx="658368" cy="658368"/>
-          </a:xfrm>
-          <a:prstGeom prst="ellipse">
-            <a:avLst/>
-          </a:prstGeom>
-          <a:solidFill>
-            <a:srgbClr val="1877F2"/>
-          </a:solidFill>
-          <a:ln>
-            <a:noFill/>
-          </a:ln>
-        </p:spPr>
-        <p:style>
-          <a:lnRef idx="1">
-            <a:schemeClr val="accent1"/>
-          </a:lnRef>
-          <a:fillRef idx="3">
-            <a:schemeClr val="accent1"/>
-          </a:fillRef>
-          <a:effectRef idx="2">
-            <a:schemeClr val="accent1"/>
-          </a:effectRef>
-          <a:fontRef idx="minor">
-            <a:schemeClr val="lt1"/>
-          </a:fontRef>
-        </p:style>
-        <p:txBody>
-          <a:bodyPr rtlCol="0" anchor="ctr"/>
-          <a:lstStyle/>
-          <a:p>
-            <a:pPr algn="ctr"/>
-          </a:p>
-        </p:txBody>
-      </p:sp>
-      <p:sp>
-        <p:nvSpPr>
-          <p:cNvPr id="13" name="TextBox 12"/>
-          <p:cNvSpPr txBox="1"/>
-          <p:nvPr/>
-        </p:nvSpPr>
-        <p:spPr>
-          <a:xfrm>
-            <a:off x="3227832" y="2487168"/>
-            <a:ext cx="320040" cy="228600"/>
-          </a:xfrm>
-          <a:prstGeom prst="rect">
-            <a:avLst/>
-          </a:prstGeom>
-          <a:noFill/>
-        </p:spPr>
-        <p:txBody>
-          <a:bodyPr wrap="square" anchor="t">
-            <a:spAutoFit/>
-          </a:bodyPr>
-          <a:lstStyle/>
-          <a:p>
-            <a:pPr algn="ctr"/>
-            <a:r>
-              <a:rPr sz="1400" b="1">
-                <a:solidFill>
-                  <a:srgbClr val="FFFFFF"/>
-                </a:solidFill>
-                <a:latin typeface="Microsoft YaHei"/>
-              </a:rPr>
-              <a:t>2</a:t>
-            </a:r>
-          </a:p>
-        </p:txBody>
-      </p:sp>
-      <p:sp>
-        <p:nvSpPr>
-          <p:cNvPr id="14" name="TextBox 13"/>
-          <p:cNvSpPr txBox="1"/>
-          <p:nvPr/>
-        </p:nvSpPr>
-        <p:spPr>
-          <a:xfrm>
-            <a:off x="2743200" y="3154680"/>
-            <a:ext cx="1325880" cy="384048"/>
-          </a:xfrm>
-          <a:prstGeom prst="rect">
-            <a:avLst/>
-          </a:prstGeom>
-          <a:noFill/>
-        </p:spPr>
-        <p:txBody>
-          <a:bodyPr wrap="square" anchor="t">
-            <a:spAutoFit/>
-          </a:bodyPr>
-          <a:lstStyle/>
-          <a:p>
-            <a:pPr algn="ctr"/>
-            <a:r>
-              <a:rPr sz="1250" b="1">
-                <a:solidFill>
-                  <a:srgbClr val="26343F"/>
-                </a:solidFill>
-                <a:latin typeface="Microsoft YaHei"/>
-              </a:rPr>
-              <a:t>????</a:t>
-            </a:r>
-          </a:p>
-        </p:txBody>
-      </p:sp>
-      <p:cxnSp>
-        <p:nvCxnSpPr>
-          <p:cNvPr id="15" name="Connector 14"/>
-          <p:cNvCxnSpPr/>
-          <p:nvPr/>
-        </p:nvCxnSpPr>
-        <p:spPr>
-          <a:xfrm>
-            <a:off x="3721608" y="2660904"/>
-            <a:ext cx="1490472" cy="0"/>
-          </a:xfrm>
-          <a:prstGeom prst="line">
-            <a:avLst/>
-          </a:prstGeom>
-          <a:ln w="27940">
-            <a:solidFill>
-              <a:srgbClr val="DAE2E8"/>
-            </a:solidFill>
-          </a:ln>
-        </p:spPr>
-        <p:style>
-          <a:lnRef idx="2">
-            <a:schemeClr val="accent1"/>
-          </a:lnRef>
-          <a:fillRef idx="0">
-            <a:schemeClr val="accent1"/>
-          </a:fillRef>
-          <a:effectRef idx="1">
-            <a:schemeClr val="accent1"/>
-          </a:effectRef>
-          <a:fontRef idx="minor">
-            <a:schemeClr val="tx1"/>
-          </a:fontRef>
-        </p:style>
-      </p:cxnSp>
-      <p:sp>
-        <p:nvSpPr>
-          <p:cNvPr id="16" name="Oval 15"/>
-          <p:cNvSpPr/>
-          <p:nvPr/>
-        </p:nvSpPr>
-        <p:spPr>
-          <a:xfrm>
-            <a:off x="5212080" y="2331720"/>
-            <a:ext cx="658368" cy="658368"/>
-          </a:xfrm>
-          <a:prstGeom prst="ellipse">
-            <a:avLst/>
-          </a:prstGeom>
-          <a:solidFill>
-            <a:srgbClr val="1877F2"/>
-          </a:solidFill>
-          <a:ln>
-            <a:noFill/>
-          </a:ln>
-        </p:spPr>
-        <p:style>
-          <a:lnRef idx="1">
-            <a:schemeClr val="accent1"/>
-          </a:lnRef>
-          <a:fillRef idx="3">
-            <a:schemeClr val="accent1"/>
-          </a:fillRef>
-          <a:effectRef idx="2">
-            <a:schemeClr val="accent1"/>
-          </a:effectRef>
-          <a:fontRef idx="minor">
-            <a:schemeClr val="lt1"/>
-          </a:fontRef>
-        </p:style>
-        <p:txBody>
-          <a:bodyPr rtlCol="0" anchor="ctr"/>
-          <a:lstStyle/>
-          <a:p>
-            <a:pPr algn="ctr"/>
-          </a:p>
-        </p:txBody>
-      </p:sp>
-      <p:sp>
-        <p:nvSpPr>
-          <p:cNvPr id="17" name="TextBox 16"/>
-          <p:cNvSpPr txBox="1"/>
-          <p:nvPr/>
-        </p:nvSpPr>
-        <p:spPr>
-          <a:xfrm>
-            <a:off x="5376672" y="2487168"/>
-            <a:ext cx="320040" cy="228600"/>
-          </a:xfrm>
-          <a:prstGeom prst="rect">
-            <a:avLst/>
-          </a:prstGeom>
-          <a:noFill/>
-        </p:spPr>
-        <p:txBody>
-          <a:bodyPr wrap="square" anchor="t">
-            <a:spAutoFit/>
-          </a:bodyPr>
-          <a:lstStyle/>
-          <a:p>
-            <a:pPr algn="ctr"/>
-            <a:r>
-              <a:rPr sz="1400" b="1">
-                <a:solidFill>
-                  <a:srgbClr val="FFFFFF"/>
-                </a:solidFill>
-                <a:latin typeface="Microsoft YaHei"/>
-              </a:rPr>
-              <a:t>3</a:t>
-            </a:r>
-          </a:p>
-        </p:txBody>
-      </p:sp>
-      <p:sp>
-        <p:nvSpPr>
-          <p:cNvPr id="18" name="TextBox 17"/>
-          <p:cNvSpPr txBox="1"/>
-          <p:nvPr/>
-        </p:nvSpPr>
-        <p:spPr>
-          <a:xfrm>
-            <a:off x="4892040" y="3154680"/>
-            <a:ext cx="1325880" cy="384048"/>
-          </a:xfrm>
-          <a:prstGeom prst="rect">
-            <a:avLst/>
-          </a:prstGeom>
-          <a:noFill/>
-        </p:spPr>
-        <p:txBody>
-          <a:bodyPr wrap="square" anchor="t">
-            <a:spAutoFit/>
-          </a:bodyPr>
-          <a:lstStyle/>
-          <a:p>
-            <a:pPr algn="ctr"/>
-            <a:r>
-              <a:rPr sz="1250" b="1">
-                <a:solidFill>
-                  <a:srgbClr val="26343F"/>
-                </a:solidFill>
-                <a:latin typeface="Microsoft YaHei"/>
-              </a:rPr>
-              <a:t>??????</a:t>
-            </a:r>
-          </a:p>
-        </p:txBody>
-      </p:sp>
-      <p:cxnSp>
-        <p:nvCxnSpPr>
-          <p:cNvPr id="19" name="Connector 18"/>
-          <p:cNvCxnSpPr/>
-          <p:nvPr/>
-        </p:nvCxnSpPr>
-        <p:spPr>
-          <a:xfrm>
-            <a:off x="5870448" y="2660904"/>
-            <a:ext cx="1490472" cy="0"/>
-          </a:xfrm>
-          <a:prstGeom prst="line">
-            <a:avLst/>
-          </a:prstGeom>
-          <a:ln w="27940">
-            <a:solidFill>
-              <a:srgbClr val="DAE2E8"/>
-            </a:solidFill>
-          </a:ln>
-        </p:spPr>
-        <p:style>
-          <a:lnRef idx="2">
-            <a:schemeClr val="accent1"/>
-          </a:lnRef>
-          <a:fillRef idx="0">
-            <a:schemeClr val="accent1"/>
-          </a:fillRef>
-          <a:effectRef idx="1">
-            <a:schemeClr val="accent1"/>
-          </a:effectRef>
-          <a:fontRef idx="minor">
-            <a:schemeClr val="tx1"/>
-          </a:fontRef>
-        </p:style>
-      </p:cxnSp>
-      <p:sp>
-        <p:nvSpPr>
-          <p:cNvPr id="20" name="Oval 19"/>
-          <p:cNvSpPr/>
-          <p:nvPr/>
-        </p:nvSpPr>
-        <p:spPr>
-          <a:xfrm>
-            <a:off x="7360920" y="2331720"/>
-            <a:ext cx="658368" cy="658368"/>
+            <a:off x="6958584" y="2286000"/>
+            <a:ext cx="146304" cy="146304"/>
           </a:xfrm>
           <a:prstGeom prst="ellipse">
             <a:avLst/>
@@ -5203,14 +4441,14 @@
       </p:sp>
       <p:sp>
         <p:nvSpPr>
-          <p:cNvPr id="21" name="TextBox 20"/>
+          <p:cNvPr id="10" name="TextBox 9"/>
           <p:cNvSpPr txBox="1"/>
           <p:nvPr/>
         </p:nvSpPr>
         <p:spPr>
           <a:xfrm>
-            <a:off x="7525512" y="2487168"/>
-            <a:ext cx="320040" cy="228600"/>
+            <a:off x="7223760" y="2221992"/>
+            <a:ext cx="3794760" cy="411480"/>
           </a:xfrm>
           <a:prstGeom prst="rect">
             <a:avLst/>
@@ -5223,198 +4461,15 @@
           </a:bodyPr>
           <a:lstStyle/>
           <a:p>
-            <a:pPr algn="ctr"/>
-            <a:r>
-              <a:rPr sz="1400" b="1">
-                <a:solidFill>
-                  <a:srgbClr val="FFFFFF"/>
+            <a:pPr algn="l"/>
+            <a:r>
+              <a:rPr sz="1250" b="0">
+                <a:solidFill>
+                  <a:srgbClr val="26343F"/>
                 </a:solidFill>
                 <a:latin typeface="Microsoft YaHei"/>
               </a:rPr>
-              <a:t>4</a:t>
-            </a:r>
-          </a:p>
-        </p:txBody>
-      </p:sp>
-      <p:sp>
-        <p:nvSpPr>
-          <p:cNvPr id="22" name="TextBox 21"/>
-          <p:cNvSpPr txBox="1"/>
-          <p:nvPr/>
-        </p:nvSpPr>
-        <p:spPr>
-          <a:xfrm>
-            <a:off x="7040880" y="3154680"/>
-            <a:ext cx="1325880" cy="384048"/>
-          </a:xfrm>
-          <a:prstGeom prst="rect">
-            <a:avLst/>
-          </a:prstGeom>
-          <a:noFill/>
-        </p:spPr>
-        <p:txBody>
-          <a:bodyPr wrap="square" anchor="t">
-            <a:spAutoFit/>
-          </a:bodyPr>
-          <a:lstStyle/>
-          <a:p>
-            <a:pPr algn="ctr"/>
-            <a:r>
-              <a:rPr sz="1250" b="1">
-                <a:solidFill>
-                  <a:srgbClr val="26343F"/>
-                </a:solidFill>
-                <a:latin typeface="Microsoft YaHei"/>
-              </a:rPr>
-              <a:t>????</a:t>
-            </a:r>
-          </a:p>
-        </p:txBody>
-      </p:sp>
-      <p:cxnSp>
-        <p:nvCxnSpPr>
-          <p:cNvPr id="23" name="Connector 22"/>
-          <p:cNvCxnSpPr/>
-          <p:nvPr/>
-        </p:nvCxnSpPr>
-        <p:spPr>
-          <a:xfrm>
-            <a:off x="8019288" y="2660904"/>
-            <a:ext cx="1490472" cy="0"/>
-          </a:xfrm>
-          <a:prstGeom prst="line">
-            <a:avLst/>
-          </a:prstGeom>
-          <a:ln w="27940">
-            <a:solidFill>
-              <a:srgbClr val="DAE2E8"/>
-            </a:solidFill>
-          </a:ln>
-        </p:spPr>
-        <p:style>
-          <a:lnRef idx="2">
-            <a:schemeClr val="accent1"/>
-          </a:lnRef>
-          <a:fillRef idx="0">
-            <a:schemeClr val="accent1"/>
-          </a:fillRef>
-          <a:effectRef idx="1">
-            <a:schemeClr val="accent1"/>
-          </a:effectRef>
-          <a:fontRef idx="minor">
-            <a:schemeClr val="tx1"/>
-          </a:fontRef>
-        </p:style>
-      </p:cxnSp>
-      <p:sp>
-        <p:nvSpPr>
-          <p:cNvPr id="24" name="Oval 23"/>
-          <p:cNvSpPr/>
-          <p:nvPr/>
-        </p:nvSpPr>
-        <p:spPr>
-          <a:xfrm>
-            <a:off x="9509760" y="2331720"/>
-            <a:ext cx="658368" cy="658368"/>
-          </a:xfrm>
-          <a:prstGeom prst="ellipse">
-            <a:avLst/>
-          </a:prstGeom>
-          <a:solidFill>
-            <a:srgbClr val="409669"/>
-          </a:solidFill>
-          <a:ln>
-            <a:noFill/>
-          </a:ln>
-        </p:spPr>
-        <p:style>
-          <a:lnRef idx="1">
-            <a:schemeClr val="accent1"/>
-          </a:lnRef>
-          <a:fillRef idx="3">
-            <a:schemeClr val="accent1"/>
-          </a:fillRef>
-          <a:effectRef idx="2">
-            <a:schemeClr val="accent1"/>
-          </a:effectRef>
-          <a:fontRef idx="minor">
-            <a:schemeClr val="lt1"/>
-          </a:fontRef>
-        </p:style>
-        <p:txBody>
-          <a:bodyPr rtlCol="0" anchor="ctr"/>
-          <a:lstStyle/>
-          <a:p>
-            <a:pPr algn="ctr"/>
-          </a:p>
-        </p:txBody>
-      </p:sp>
-      <p:sp>
-        <p:nvSpPr>
-          <p:cNvPr id="25" name="TextBox 24"/>
-          <p:cNvSpPr txBox="1"/>
-          <p:nvPr/>
-        </p:nvSpPr>
-        <p:spPr>
-          <a:xfrm>
-            <a:off x="9674352" y="2487168"/>
-            <a:ext cx="320040" cy="228600"/>
-          </a:xfrm>
-          <a:prstGeom prst="rect">
-            <a:avLst/>
-          </a:prstGeom>
-          <a:noFill/>
-        </p:spPr>
-        <p:txBody>
-          <a:bodyPr wrap="square" anchor="t">
-            <a:spAutoFit/>
-          </a:bodyPr>
-          <a:lstStyle/>
-          <a:p>
-            <a:pPr algn="ctr"/>
-            <a:r>
-              <a:rPr sz="1400" b="1">
-                <a:solidFill>
-                  <a:srgbClr val="FFFFFF"/>
-                </a:solidFill>
-                <a:latin typeface="Microsoft YaHei"/>
-              </a:rPr>
-              <a:t>5</a:t>
-            </a:r>
-          </a:p>
-        </p:txBody>
-      </p:sp>
-      <p:sp>
-        <p:nvSpPr>
-          <p:cNvPr id="26" name="TextBox 25"/>
-          <p:cNvSpPr txBox="1"/>
-          <p:nvPr/>
-        </p:nvSpPr>
-        <p:spPr>
-          <a:xfrm>
-            <a:off x="9189720" y="3154680"/>
-            <a:ext cx="1325880" cy="384048"/>
-          </a:xfrm>
-          <a:prstGeom prst="rect">
-            <a:avLst/>
-          </a:prstGeom>
-          <a:noFill/>
-        </p:spPr>
-        <p:txBody>
-          <a:bodyPr wrap="square" anchor="t">
-            <a:spAutoFit/>
-          </a:bodyPr>
-          <a:lstStyle/>
-          <a:p>
-            <a:pPr algn="ctr"/>
-            <a:r>
-              <a:rPr sz="1250" b="1">
-                <a:solidFill>
-                  <a:srgbClr val="26343F"/>
-                </a:solidFill>
-                <a:latin typeface="Microsoft YaHei"/>
-              </a:rPr>
-              <a:t>?????</a:t>
+              <a:t>演示顺序要贴近客户使用，而不是按技术模块讲。先让客户看到价值，再补管理能力。</a:t>
             </a:r>
           </a:p>
         </p:txBody>
@@ -5539,8 +4594,8 @@
         </p:nvSpPr>
         <p:spPr>
           <a:xfrm>
-            <a:off x="594360" y="502920"/>
-            <a:ext cx="8138160" cy="438912"/>
+            <a:off x="594360" y="512064"/>
+            <a:ext cx="8595360" cy="438912"/>
           </a:xfrm>
           <a:prstGeom prst="rect">
             <a:avLst/>
@@ -5561,7 +4616,7 @@
                 </a:solidFill>
                 <a:latin typeface="Microsoft YaHei"/>
               </a:rPr>
-              <a:t>???????????</a:t>
+              <a:t>正式使用前的准备事项</a:t>
             </a:r>
           </a:p>
         </p:txBody>
@@ -5574,8 +4629,8 @@
         </p:nvSpPr>
         <p:spPr>
           <a:xfrm>
-            <a:off x="612648" y="950976"/>
-            <a:ext cx="8046720" cy="292608"/>
+            <a:off x="11018520" y="512064"/>
+            <a:ext cx="685800" cy="320040"/>
           </a:xfrm>
           <a:prstGeom prst="rect">
             <a:avLst/>
@@ -5588,15 +4643,15 @@
           </a:bodyPr>
           <a:lstStyle/>
           <a:p>
-            <a:pPr algn="l"/>
-            <a:r>
-              <a:rPr sz="1250" b="0">
+            <a:pPr algn="r"/>
+            <a:r>
+              <a:rPr sz="1400" b="1">
                 <a:solidFill>
                   <a:srgbClr val="657684"/>
                 </a:solidFill>
                 <a:latin typeface="Microsoft YaHei"/>
               </a:rPr>
-              <a:t>??????</a:t>
+              <a:t>12</a:t>
             </a:r>
           </a:p>
         </p:txBody>
@@ -5609,43 +4664,8 @@
         </p:nvSpPr>
         <p:spPr>
           <a:xfrm>
-            <a:off x="11018520" y="502920"/>
-            <a:ext cx="685800" cy="320040"/>
-          </a:xfrm>
-          <a:prstGeom prst="rect">
-            <a:avLst/>
-          </a:prstGeom>
-          <a:noFill/>
-        </p:spPr>
-        <p:txBody>
-          <a:bodyPr wrap="square" anchor="t">
-            <a:spAutoFit/>
-          </a:bodyPr>
-          <a:lstStyle/>
-          <a:p>
-            <a:pPr algn="r"/>
-            <a:r>
-              <a:rPr sz="1400" b="1">
-                <a:solidFill>
-                  <a:srgbClr val="657684"/>
-                </a:solidFill>
-                <a:latin typeface="Microsoft YaHei"/>
-              </a:rPr>
-              <a:t>12</a:t>
-            </a:r>
-          </a:p>
-        </p:txBody>
-      </p:sp>
-      <p:sp>
-        <p:nvSpPr>
-          <p:cNvPr id="7" name="TextBox 6"/>
-          <p:cNvSpPr txBox="1"/>
-          <p:nvPr/>
-        </p:nvSpPr>
-        <p:spPr>
-          <a:xfrm>
-            <a:off x="713232" y="1481328"/>
-            <a:ext cx="5532120" cy="4297680"/>
+            <a:off x="713232" y="1417320"/>
+            <a:ext cx="5532120" cy="4389120"/>
           </a:xfrm>
           <a:prstGeom prst="rect">
             <a:avLst/>
@@ -5670,7 +4690,7 @@
               </a:defRPr>
             </a:pPr>
             <a:r>
-              <a:t>????????????????</a:t>
+              <a:t>明确首批知识资料范围和知识源分类</a:t>
             </a:r>
           </a:p>
           <a:p>
@@ -5686,7 +4706,7 @@
               </a:defRPr>
             </a:pPr>
             <a:r>
-              <a:t>????????????????</a:t>
+              <a:t>准备管理员账号和普通用户账号清单</a:t>
             </a:r>
           </a:p>
           <a:p>
@@ -5702,7 +4722,7 @@
               </a:defRPr>
             </a:pPr>
             <a:r>
-              <a:t>???????????????</a:t>
+              <a:t>确定哪些部门或角色可以访问哪些知识源</a:t>
             </a:r>
           </a:p>
           <a:p>
@@ -5718,7 +4738,7 @@
               </a:defRPr>
             </a:pPr>
             <a:r>
-              <a:t>?? 20-50 ???????????</a:t>
+              <a:t>准备 20-50 个真实问题作为验收测试样例</a:t>
             </a:r>
           </a:p>
           <a:p>
@@ -5734,20 +4754,20 @@
               </a:defRPr>
             </a:pPr>
             <a:r>
-              <a:t>???????????????????</a:t>
-            </a:r>
-          </a:p>
-        </p:txBody>
-      </p:sp>
-      <p:sp>
-        <p:nvSpPr>
-          <p:cNvPr id="8" name="Rounded Rectangle 7"/>
+              <a:t>确认部署环境、数据备份和日常维护责任人</a:t>
+            </a:r>
+          </a:p>
+        </p:txBody>
+      </p:sp>
+      <p:sp>
+        <p:nvSpPr>
+          <p:cNvPr id="7" name="Rounded Rectangle 6"/>
           <p:cNvSpPr/>
           <p:nvPr/>
         </p:nvSpPr>
         <p:spPr>
           <a:xfrm>
-            <a:off x="6629400" y="1481328"/>
+            <a:off x="6629400" y="1417320"/>
             <a:ext cx="4709160" cy="4389120"/>
           </a:xfrm>
           <a:prstGeom prst="roundRect">
@@ -5786,13 +4806,13 @@
       </p:sp>
       <p:sp>
         <p:nvSpPr>
-          <p:cNvPr id="9" name="TextBox 8"/>
+          <p:cNvPr id="8" name="TextBox 7"/>
           <p:cNvSpPr txBox="1"/>
           <p:nvPr/>
         </p:nvSpPr>
         <p:spPr>
           <a:xfrm>
-            <a:off x="6949440" y="1773936"/>
+            <a:off x="6949440" y="1709928"/>
             <a:ext cx="4069080" cy="310896"/>
           </a:xfrm>
           <a:prstGeom prst="rect">
@@ -5814,20 +4834,20 @@
                 </a:solidFill>
                 <a:latin typeface="Microsoft YaHei"/>
               </a:rPr>
-              <a:t>????</a:t>
-            </a:r>
-          </a:p>
-        </p:txBody>
-      </p:sp>
-      <p:sp>
-        <p:nvSpPr>
-          <p:cNvPr id="10" name="Oval 9"/>
+              <a:t>讲解提示</a:t>
+            </a:r>
+          </a:p>
+        </p:txBody>
+      </p:sp>
+      <p:sp>
+        <p:nvSpPr>
+          <p:cNvPr id="9" name="Oval 8"/>
           <p:cNvSpPr/>
           <p:nvPr/>
         </p:nvSpPr>
         <p:spPr>
           <a:xfrm>
-            <a:off x="6958584" y="2350008"/>
+            <a:off x="6958584" y="2286000"/>
             <a:ext cx="146304" cy="146304"/>
           </a:xfrm>
           <a:prstGeom prst="ellipse">
@@ -5864,13 +4884,13 @@
       </p:sp>
       <p:sp>
         <p:nvSpPr>
-          <p:cNvPr id="11" name="TextBox 10"/>
+          <p:cNvPr id="10" name="TextBox 9"/>
           <p:cNvSpPr txBox="1"/>
           <p:nvPr/>
         </p:nvSpPr>
         <p:spPr>
           <a:xfrm>
-            <a:off x="7223760" y="2286000"/>
+            <a:off x="7223760" y="2221992"/>
             <a:ext cx="3794760" cy="411480"/>
           </a:xfrm>
           <a:prstGeom prst="rect">
@@ -5892,7 +4912,7 @@
                 </a:solidFill>
                 <a:latin typeface="Microsoft YaHei"/>
               </a:rPr>
-              <a:t>?????????????????????????????????</a:t>
+              <a:t>收尾不要只说“系统已经做好”，要引导客户提供上线所需资料和验收问题。这样后续项目推进会更顺。</a:t>
             </a:r>
           </a:p>
         </p:txBody>
@@ -6017,8 +5037,8 @@
         </p:nvSpPr>
         <p:spPr>
           <a:xfrm>
-            <a:off x="594360" y="502920"/>
-            <a:ext cx="8138160" cy="438912"/>
+            <a:off x="594360" y="512064"/>
+            <a:ext cx="8595360" cy="438912"/>
           </a:xfrm>
           <a:prstGeom prst="rect">
             <a:avLst/>
@@ -6039,7 +5059,7 @@
                 </a:solidFill>
                 <a:latin typeface="Microsoft YaHei"/>
               </a:rPr>
-              <a:t>????? RAGPro</a:t>
+              <a:t>为什么需要这套系统</a:t>
             </a:r>
           </a:p>
         </p:txBody>
@@ -6052,8 +5072,8 @@
         </p:nvSpPr>
         <p:spPr>
           <a:xfrm>
-            <a:off x="612648" y="950976"/>
-            <a:ext cx="8046720" cy="292608"/>
+            <a:off x="11018520" y="512064"/>
+            <a:ext cx="685800" cy="320040"/>
           </a:xfrm>
           <a:prstGeom prst="rect">
             <a:avLst/>
@@ -6066,15 +5086,15 @@
           </a:bodyPr>
           <a:lstStyle/>
           <a:p>
-            <a:pPr algn="l"/>
-            <a:r>
-              <a:rPr sz="1250" b="0">
+            <a:pPr algn="r"/>
+            <a:r>
+              <a:rPr sz="1400" b="1">
                 <a:solidFill>
                   <a:srgbClr val="657684"/>
                 </a:solidFill>
                 <a:latin typeface="Microsoft YaHei"/>
               </a:rPr>
-              <a:t>???????</a:t>
+              <a:t>02</a:t>
             </a:r>
           </a:p>
         </p:txBody>
@@ -6087,43 +5107,8 @@
         </p:nvSpPr>
         <p:spPr>
           <a:xfrm>
-            <a:off x="11018520" y="502920"/>
-            <a:ext cx="685800" cy="320040"/>
-          </a:xfrm>
-          <a:prstGeom prst="rect">
-            <a:avLst/>
-          </a:prstGeom>
-          <a:noFill/>
-        </p:spPr>
-        <p:txBody>
-          <a:bodyPr wrap="square" anchor="t">
-            <a:spAutoFit/>
-          </a:bodyPr>
-          <a:lstStyle/>
-          <a:p>
-            <a:pPr algn="r"/>
-            <a:r>
-              <a:rPr sz="1400" b="1">
-                <a:solidFill>
-                  <a:srgbClr val="657684"/>
-                </a:solidFill>
-                <a:latin typeface="Microsoft YaHei"/>
-              </a:rPr>
-              <a:t>02</a:t>
-            </a:r>
-          </a:p>
-        </p:txBody>
-      </p:sp>
-      <p:sp>
-        <p:nvSpPr>
-          <p:cNvPr id="7" name="TextBox 6"/>
-          <p:cNvSpPr txBox="1"/>
-          <p:nvPr/>
-        </p:nvSpPr>
-        <p:spPr>
-          <a:xfrm>
-            <a:off x="713232" y="1481328"/>
-            <a:ext cx="5532120" cy="4297680"/>
+            <a:off x="713232" y="1417320"/>
+            <a:ext cx="5532120" cy="4389120"/>
           </a:xfrm>
           <a:prstGeom prst="rect">
             <a:avLst/>
@@ -6148,7 +5133,7 @@
               </a:defRPr>
             </a:pPr>
             <a:r>
-              <a:t>??????????????????</a:t>
+              <a:t>文档分散，员工不知道去哪里找最新资料</a:t>
             </a:r>
           </a:p>
           <a:p>
@@ -6164,7 +5149,7 @@
               </a:defRPr>
             </a:pPr>
             <a:r>
-              <a:t>?????????????????</a:t>
+              <a:t>传统搜索只能给文件，不能直接给答案</a:t>
             </a:r>
           </a:p>
           <a:p>
@@ -6180,7 +5165,7 @@
               </a:defRPr>
             </a:pPr>
             <a:r>
-              <a:t>?????????????????</a:t>
+              <a:t>人工答疑重复劳动多，知识沉淀难复用</a:t>
             </a:r>
           </a:p>
           <a:p>
@@ -6196,7 +5181,7 @@
               </a:defRPr>
             </a:pPr>
             <a:r>
-              <a:t>????????????????????</a:t>
+              <a:t>不同岗位可看的知识范围不同，需要权限控制</a:t>
             </a:r>
           </a:p>
           <a:p>
@@ -6212,20 +5197,20 @@
               </a:defRPr>
             </a:pPr>
             <a:r>
-              <a:t>???????????????????</a:t>
-            </a:r>
-          </a:p>
-        </p:txBody>
-      </p:sp>
-      <p:sp>
-        <p:nvSpPr>
-          <p:cNvPr id="8" name="Rounded Rectangle 7"/>
+              <a:t>知识更新后，需要有可维护的上传和重建索引流程</a:t>
+            </a:r>
+          </a:p>
+        </p:txBody>
+      </p:sp>
+      <p:sp>
+        <p:nvSpPr>
+          <p:cNvPr id="7" name="Rounded Rectangle 6"/>
           <p:cNvSpPr/>
           <p:nvPr/>
         </p:nvSpPr>
         <p:spPr>
           <a:xfrm>
-            <a:off x="6629400" y="1481328"/>
+            <a:off x="6629400" y="1417320"/>
             <a:ext cx="4709160" cy="4389120"/>
           </a:xfrm>
           <a:prstGeom prst="roundRect">
@@ -6264,13 +5249,13 @@
       </p:sp>
       <p:sp>
         <p:nvSpPr>
-          <p:cNvPr id="9" name="TextBox 8"/>
+          <p:cNvPr id="8" name="TextBox 7"/>
           <p:cNvSpPr txBox="1"/>
           <p:nvPr/>
         </p:nvSpPr>
         <p:spPr>
           <a:xfrm>
-            <a:off x="6949440" y="1773936"/>
+            <a:off x="6949440" y="1709928"/>
             <a:ext cx="4069080" cy="310896"/>
           </a:xfrm>
           <a:prstGeom prst="rect">
@@ -6292,20 +5277,20 @@
                 </a:solidFill>
                 <a:latin typeface="Microsoft YaHei"/>
               </a:rPr>
-              <a:t>????</a:t>
-            </a:r>
-          </a:p>
-        </p:txBody>
-      </p:sp>
-      <p:sp>
-        <p:nvSpPr>
-          <p:cNvPr id="10" name="Oval 9"/>
+              <a:t>讲解提示</a:t>
+            </a:r>
+          </a:p>
+        </p:txBody>
+      </p:sp>
+      <p:sp>
+        <p:nvSpPr>
+          <p:cNvPr id="9" name="Oval 8"/>
           <p:cNvSpPr/>
           <p:nvPr/>
         </p:nvSpPr>
         <p:spPr>
           <a:xfrm>
-            <a:off x="6958584" y="2350008"/>
+            <a:off x="6958584" y="2286000"/>
             <a:ext cx="146304" cy="146304"/>
           </a:xfrm>
           <a:prstGeom prst="ellipse">
@@ -6342,13 +5327,13 @@
       </p:sp>
       <p:sp>
         <p:nvSpPr>
-          <p:cNvPr id="11" name="TextBox 10"/>
+          <p:cNvPr id="10" name="TextBox 9"/>
           <p:cNvSpPr txBox="1"/>
           <p:nvPr/>
         </p:nvSpPr>
         <p:spPr>
           <a:xfrm>
-            <a:off x="7223760" y="2286000"/>
+            <a:off x="7223760" y="2221992"/>
             <a:ext cx="3794760" cy="411480"/>
           </a:xfrm>
           <a:prstGeom prst="rect">
@@ -6370,7 +5355,7 @@
                 </a:solidFill>
                 <a:latin typeface="Microsoft YaHei"/>
               </a:rPr>
-              <a:t>??????????????????????????????????????</a:t>
+              <a:t>这一页不要讲技术，讲客户日常痛点。可以举例：“新人问制度、业务人员查流程、管理员更新资料”，这些都是系统要覆盖的场景。</a:t>
             </a:r>
           </a:p>
         </p:txBody>
@@ -6495,8 +5480,8 @@
         </p:nvSpPr>
         <p:spPr>
           <a:xfrm>
-            <a:off x="594360" y="502920"/>
-            <a:ext cx="8138160" cy="438912"/>
+            <a:off x="594360" y="512064"/>
+            <a:ext cx="8595360" cy="438912"/>
           </a:xfrm>
           <a:prstGeom prst="rect">
             <a:avLst/>
@@ -6517,7 +5502,7 @@
                 </a:solidFill>
                 <a:latin typeface="Microsoft YaHei"/>
               </a:rPr>
-              <a:t>????????</a:t>
+              <a:t>从知识资料到可信问答</a:t>
             </a:r>
           </a:p>
         </p:txBody>
@@ -6530,8 +5515,8 @@
         </p:nvSpPr>
         <p:spPr>
           <a:xfrm>
-            <a:off x="612648" y="950976"/>
-            <a:ext cx="8046720" cy="292608"/>
+            <a:off x="11018520" y="512064"/>
+            <a:ext cx="685800" cy="320040"/>
           </a:xfrm>
           <a:prstGeom prst="rect">
             <a:avLst/>
@@ -6544,15 +5529,15 @@
           </a:bodyPr>
           <a:lstStyle/>
           <a:p>
-            <a:pPr algn="l"/>
-            <a:r>
-              <a:rPr sz="1250" b="0">
+            <a:pPr algn="r"/>
+            <a:r>
+              <a:rPr sz="1400" b="1">
                 <a:solidFill>
                   <a:srgbClr val="657684"/>
                 </a:solidFill>
                 <a:latin typeface="Microsoft YaHei"/>
               </a:rPr>
-              <a:t>??????</a:t>
+              <a:t>03</a:t>
             </a:r>
           </a:p>
         </p:txBody>
@@ -6565,43 +5550,8 @@
         </p:nvSpPr>
         <p:spPr>
           <a:xfrm>
-            <a:off x="11018520" y="502920"/>
-            <a:ext cx="685800" cy="320040"/>
-          </a:xfrm>
-          <a:prstGeom prst="rect">
-            <a:avLst/>
-          </a:prstGeom>
-          <a:noFill/>
-        </p:spPr>
-        <p:txBody>
-          <a:bodyPr wrap="square" anchor="t">
-            <a:spAutoFit/>
-          </a:bodyPr>
-          <a:lstStyle/>
-          <a:p>
-            <a:pPr algn="r"/>
-            <a:r>
-              <a:rPr sz="1400" b="1">
-                <a:solidFill>
-                  <a:srgbClr val="657684"/>
-                </a:solidFill>
-                <a:latin typeface="Microsoft YaHei"/>
-              </a:rPr>
-              <a:t>03</a:t>
-            </a:r>
-          </a:p>
-        </p:txBody>
-      </p:sp>
-      <p:sp>
-        <p:nvSpPr>
-          <p:cNvPr id="7" name="TextBox 6"/>
-          <p:cNvSpPr txBox="1"/>
-          <p:nvPr/>
-        </p:nvSpPr>
-        <p:spPr>
-          <a:xfrm>
-            <a:off x="713232" y="1481328"/>
-            <a:ext cx="5532120" cy="4297680"/>
+            <a:off x="713232" y="1417320"/>
+            <a:ext cx="5532120" cy="4389120"/>
           </a:xfrm>
           <a:prstGeom prst="rect">
             <a:avLst/>
@@ -6626,7 +5576,7 @@
               </a:defRPr>
             </a:pPr>
             <a:r>
-              <a:t>????????????</a:t>
+              <a:t>管理员上传或维护知识资料</a:t>
             </a:r>
           </a:p>
           <a:p>
@@ -6642,7 +5592,7 @@
               </a:defRPr>
             </a:pPr>
             <a:r>
-              <a:t>?????????????</a:t>
+              <a:t>系统解析文档并建立检索索引</a:t>
             </a:r>
           </a:p>
           <a:p>
@@ -6658,7 +5608,7 @@
               </a:defRPr>
             </a:pPr>
             <a:r>
-              <a:t>???????????????</a:t>
+              <a:t>用户登录后按权限访问对应知识源</a:t>
             </a:r>
           </a:p>
           <a:p>
@@ -6674,7 +5624,7 @@
               </a:defRPr>
             </a:pPr>
             <a:r>
-              <a:t>???????? FAQ?????????????</a:t>
+              <a:t>用户提问后，系统先匹配 FAQ，再进行知识检索和答案生成</a:t>
             </a:r>
           </a:p>
           <a:p>
@@ -6690,30 +5640,32 @@
               </a:defRPr>
             </a:pPr>
             <a:r>
-              <a:t>????????????????????</a:t>
-            </a:r>
-          </a:p>
-        </p:txBody>
-      </p:sp>
-      <p:sp>
-        <p:nvSpPr>
-          <p:cNvPr id="8" name="Rounded Rectangle 7"/>
+              <a:t>管理员可查看用户、权限、知识源和审计记录</a:t>
+            </a:r>
+          </a:p>
+        </p:txBody>
+      </p:sp>
+      <p:sp>
+        <p:nvSpPr>
+          <p:cNvPr id="7" name="Rounded Rectangle 6"/>
           <p:cNvSpPr/>
           <p:nvPr/>
         </p:nvSpPr>
         <p:spPr>
           <a:xfrm>
-            <a:off x="685800" y="2743200"/>
-            <a:ext cx="1874519" cy="777240"/>
+            <a:off x="6629400" y="1417320"/>
+            <a:ext cx="4709160" cy="4389120"/>
           </a:xfrm>
           <a:prstGeom prst="roundRect">
             <a:avLst/>
           </a:prstGeom>
           <a:solidFill>
-            <a:srgbClr val="1877F2"/>
+            <a:srgbClr val="FFFFFF"/>
           </a:solidFill>
-          <a:ln>
-            <a:noFill/>
+          <a:ln w="12700">
+            <a:solidFill>
+              <a:srgbClr val="DAE2E8"/>
+            </a:solidFill>
           </a:ln>
         </p:spPr>
         <p:style>
@@ -6740,14 +5692,14 @@
       </p:sp>
       <p:sp>
         <p:nvSpPr>
-          <p:cNvPr id="9" name="TextBox 8"/>
+          <p:cNvPr id="8" name="TextBox 7"/>
           <p:cNvSpPr txBox="1"/>
           <p:nvPr/>
         </p:nvSpPr>
         <p:spPr>
           <a:xfrm>
-            <a:off x="832104" y="2962656"/>
-            <a:ext cx="1600199" cy="274320"/>
+            <a:off x="6949440" y="1709928"/>
+            <a:ext cx="4069080" cy="310896"/>
           </a:xfrm>
           <a:prstGeom prst="rect">
             <a:avLst/>
@@ -6760,195 +5712,31 @@
           </a:bodyPr>
           <a:lstStyle/>
           <a:p>
-            <a:pPr algn="ctr"/>
+            <a:pPr algn="l"/>
             <a:r>
               <a:rPr sz="1500" b="1">
                 <a:solidFill>
-                  <a:srgbClr val="FFFFFF"/>
+                  <a:srgbClr val="142B43"/>
                 </a:solidFill>
                 <a:latin typeface="Microsoft YaHei"/>
               </a:rPr>
-              <a:t>????</a:t>
-            </a:r>
-          </a:p>
-        </p:txBody>
-      </p:sp>
-      <p:sp>
-        <p:nvSpPr>
-          <p:cNvPr id="10" name="Right Arrow 9"/>
+              <a:t>讲解提示</a:t>
+            </a:r>
+          </a:p>
+        </p:txBody>
+      </p:sp>
+      <p:sp>
+        <p:nvSpPr>
+          <p:cNvPr id="9" name="Oval 8"/>
           <p:cNvSpPr/>
           <p:nvPr/>
         </p:nvSpPr>
         <p:spPr>
           <a:xfrm>
-            <a:off x="2542032" y="2953512"/>
-            <a:ext cx="438912" cy="347472"/>
-          </a:xfrm>
-          <a:prstGeom prst="rightArrow">
-            <a:avLst/>
-          </a:prstGeom>
-          <a:solidFill>
-            <a:srgbClr val="DAE2E8"/>
-          </a:solidFill>
-          <a:ln>
-            <a:noFill/>
-          </a:ln>
-        </p:spPr>
-        <p:style>
-          <a:lnRef idx="1">
-            <a:schemeClr val="accent1"/>
-          </a:lnRef>
-          <a:fillRef idx="3">
-            <a:schemeClr val="accent1"/>
-          </a:fillRef>
-          <a:effectRef idx="2">
-            <a:schemeClr val="accent1"/>
-          </a:effectRef>
-          <a:fontRef idx="minor">
-            <a:schemeClr val="lt1"/>
-          </a:fontRef>
-        </p:style>
-        <p:txBody>
-          <a:bodyPr rtlCol="0" anchor="ctr"/>
-          <a:lstStyle/>
-          <a:p>
-            <a:pPr algn="ctr"/>
-          </a:p>
-        </p:txBody>
-      </p:sp>
-      <p:sp>
-        <p:nvSpPr>
-          <p:cNvPr id="11" name="Rounded Rectangle 10"/>
-          <p:cNvSpPr/>
-          <p:nvPr/>
-        </p:nvSpPr>
-        <p:spPr>
-          <a:xfrm>
-            <a:off x="2862072" y="2743200"/>
-            <a:ext cx="1874519" cy="777240"/>
-          </a:xfrm>
-          <a:prstGeom prst="roundRect">
-            <a:avLst/>
-          </a:prstGeom>
-          <a:solidFill>
-            <a:srgbClr val="20B4BE"/>
-          </a:solidFill>
-          <a:ln>
-            <a:noFill/>
-          </a:ln>
-        </p:spPr>
-        <p:style>
-          <a:lnRef idx="1">
-            <a:schemeClr val="accent1"/>
-          </a:lnRef>
-          <a:fillRef idx="3">
-            <a:schemeClr val="accent1"/>
-          </a:fillRef>
-          <a:effectRef idx="2">
-            <a:schemeClr val="accent1"/>
-          </a:effectRef>
-          <a:fontRef idx="minor">
-            <a:schemeClr val="lt1"/>
-          </a:fontRef>
-        </p:style>
-        <p:txBody>
-          <a:bodyPr rtlCol="0" anchor="ctr"/>
-          <a:lstStyle/>
-          <a:p>
-            <a:pPr algn="ctr"/>
-          </a:p>
-        </p:txBody>
-      </p:sp>
-      <p:sp>
-        <p:nvSpPr>
-          <p:cNvPr id="12" name="TextBox 11"/>
-          <p:cNvSpPr txBox="1"/>
-          <p:nvPr/>
-        </p:nvSpPr>
-        <p:spPr>
-          <a:xfrm>
-            <a:off x="3008376" y="2962656"/>
-            <a:ext cx="1600199" cy="274320"/>
-          </a:xfrm>
-          <a:prstGeom prst="rect">
-            <a:avLst/>
-          </a:prstGeom>
-          <a:noFill/>
-        </p:spPr>
-        <p:txBody>
-          <a:bodyPr wrap="square" anchor="t">
-            <a:spAutoFit/>
-          </a:bodyPr>
-          <a:lstStyle/>
-          <a:p>
-            <a:pPr algn="ctr"/>
-            <a:r>
-              <a:rPr sz="1500" b="1">
-                <a:solidFill>
-                  <a:srgbClr val="FFFFFF"/>
-                </a:solidFill>
-                <a:latin typeface="Microsoft YaHei"/>
-              </a:rPr>
-              <a:t>????</a:t>
-            </a:r>
-          </a:p>
-        </p:txBody>
-      </p:sp>
-      <p:sp>
-        <p:nvSpPr>
-          <p:cNvPr id="13" name="Right Arrow 12"/>
-          <p:cNvSpPr/>
-          <p:nvPr/>
-        </p:nvSpPr>
-        <p:spPr>
-          <a:xfrm>
-            <a:off x="4718304" y="2953512"/>
-            <a:ext cx="438912" cy="347472"/>
-          </a:xfrm>
-          <a:prstGeom prst="rightArrow">
-            <a:avLst/>
-          </a:prstGeom>
-          <a:solidFill>
-            <a:srgbClr val="DAE2E8"/>
-          </a:solidFill>
-          <a:ln>
-            <a:noFill/>
-          </a:ln>
-        </p:spPr>
-        <p:style>
-          <a:lnRef idx="1">
-            <a:schemeClr val="accent1"/>
-          </a:lnRef>
-          <a:fillRef idx="3">
-            <a:schemeClr val="accent1"/>
-          </a:fillRef>
-          <a:effectRef idx="2">
-            <a:schemeClr val="accent1"/>
-          </a:effectRef>
-          <a:fontRef idx="minor">
-            <a:schemeClr val="lt1"/>
-          </a:fontRef>
-        </p:style>
-        <p:txBody>
-          <a:bodyPr rtlCol="0" anchor="ctr"/>
-          <a:lstStyle/>
-          <a:p>
-            <a:pPr algn="ctr"/>
-          </a:p>
-        </p:txBody>
-      </p:sp>
-      <p:sp>
-        <p:nvSpPr>
-          <p:cNvPr id="14" name="Rounded Rectangle 13"/>
-          <p:cNvSpPr/>
-          <p:nvPr/>
-        </p:nvSpPr>
-        <p:spPr>
-          <a:xfrm>
-            <a:off x="5038344" y="2743200"/>
-            <a:ext cx="1874519" cy="777240"/>
-          </a:xfrm>
-          <a:prstGeom prst="roundRect">
+            <a:off x="6958584" y="2286000"/>
+            <a:ext cx="146304" cy="146304"/>
+          </a:xfrm>
+          <a:prstGeom prst="ellipse">
             <a:avLst/>
           </a:prstGeom>
           <a:solidFill>
@@ -6982,14 +5770,14 @@
       </p:sp>
       <p:sp>
         <p:nvSpPr>
-          <p:cNvPr id="15" name="TextBox 14"/>
+          <p:cNvPr id="10" name="TextBox 9"/>
           <p:cNvSpPr txBox="1"/>
           <p:nvPr/>
         </p:nvSpPr>
         <p:spPr>
           <a:xfrm>
-            <a:off x="5184648" y="2962656"/>
-            <a:ext cx="1600199" cy="274320"/>
+            <a:off x="7223760" y="2221992"/>
+            <a:ext cx="3794760" cy="411480"/>
           </a:xfrm>
           <a:prstGeom prst="rect">
             <a:avLst/>
@@ -7002,257 +5790,15 @@
           </a:bodyPr>
           <a:lstStyle/>
           <a:p>
-            <a:pPr algn="ctr"/>
-            <a:r>
-              <a:rPr sz="1500" b="1">
-                <a:solidFill>
-                  <a:srgbClr val="FFFFFF"/>
+            <a:pPr algn="l"/>
+            <a:r>
+              <a:rPr sz="1250" b="0">
+                <a:solidFill>
+                  <a:srgbClr val="26343F"/>
                 </a:solidFill>
                 <a:latin typeface="Microsoft YaHei"/>
               </a:rPr>
-              <a:t>????</a:t>
-            </a:r>
-          </a:p>
-        </p:txBody>
-      </p:sp>
-      <p:sp>
-        <p:nvSpPr>
-          <p:cNvPr id="16" name="Right Arrow 15"/>
-          <p:cNvSpPr/>
-          <p:nvPr/>
-        </p:nvSpPr>
-        <p:spPr>
-          <a:xfrm>
-            <a:off x="6894576" y="2953512"/>
-            <a:ext cx="438912" cy="347472"/>
-          </a:xfrm>
-          <a:prstGeom prst="rightArrow">
-            <a:avLst/>
-          </a:prstGeom>
-          <a:solidFill>
-            <a:srgbClr val="DAE2E8"/>
-          </a:solidFill>
-          <a:ln>
-            <a:noFill/>
-          </a:ln>
-        </p:spPr>
-        <p:style>
-          <a:lnRef idx="1">
-            <a:schemeClr val="accent1"/>
-          </a:lnRef>
-          <a:fillRef idx="3">
-            <a:schemeClr val="accent1"/>
-          </a:fillRef>
-          <a:effectRef idx="2">
-            <a:schemeClr val="accent1"/>
-          </a:effectRef>
-          <a:fontRef idx="minor">
-            <a:schemeClr val="lt1"/>
-          </a:fontRef>
-        </p:style>
-        <p:txBody>
-          <a:bodyPr rtlCol="0" anchor="ctr"/>
-          <a:lstStyle/>
-          <a:p>
-            <a:pPr algn="ctr"/>
-          </a:p>
-        </p:txBody>
-      </p:sp>
-      <p:sp>
-        <p:nvSpPr>
-          <p:cNvPr id="17" name="Rounded Rectangle 16"/>
-          <p:cNvSpPr/>
-          <p:nvPr/>
-        </p:nvSpPr>
-        <p:spPr>
-          <a:xfrm>
-            <a:off x="7214616" y="2743200"/>
-            <a:ext cx="1874519" cy="777240"/>
-          </a:xfrm>
-          <a:prstGeom prst="roundRect">
-            <a:avLst/>
-          </a:prstGeom>
-          <a:solidFill>
-            <a:srgbClr val="EC8B40"/>
-          </a:solidFill>
-          <a:ln>
-            <a:noFill/>
-          </a:ln>
-        </p:spPr>
-        <p:style>
-          <a:lnRef idx="1">
-            <a:schemeClr val="accent1"/>
-          </a:lnRef>
-          <a:fillRef idx="3">
-            <a:schemeClr val="accent1"/>
-          </a:fillRef>
-          <a:effectRef idx="2">
-            <a:schemeClr val="accent1"/>
-          </a:effectRef>
-          <a:fontRef idx="minor">
-            <a:schemeClr val="lt1"/>
-          </a:fontRef>
-        </p:style>
-        <p:txBody>
-          <a:bodyPr rtlCol="0" anchor="ctr"/>
-          <a:lstStyle/>
-          <a:p>
-            <a:pPr algn="ctr"/>
-          </a:p>
-        </p:txBody>
-      </p:sp>
-      <p:sp>
-        <p:nvSpPr>
-          <p:cNvPr id="18" name="TextBox 17"/>
-          <p:cNvSpPr txBox="1"/>
-          <p:nvPr/>
-        </p:nvSpPr>
-        <p:spPr>
-          <a:xfrm>
-            <a:off x="7360919" y="2962656"/>
-            <a:ext cx="1600199" cy="274320"/>
-          </a:xfrm>
-          <a:prstGeom prst="rect">
-            <a:avLst/>
-          </a:prstGeom>
-          <a:noFill/>
-        </p:spPr>
-        <p:txBody>
-          <a:bodyPr wrap="square" anchor="t">
-            <a:spAutoFit/>
-          </a:bodyPr>
-          <a:lstStyle/>
-          <a:p>
-            <a:pPr algn="ctr"/>
-            <a:r>
-              <a:rPr sz="1500" b="1">
-                <a:solidFill>
-                  <a:srgbClr val="FFFFFF"/>
-                </a:solidFill>
-                <a:latin typeface="Microsoft YaHei"/>
-              </a:rPr>
-              <a:t>????</a:t>
-            </a:r>
-          </a:p>
-        </p:txBody>
-      </p:sp>
-      <p:sp>
-        <p:nvSpPr>
-          <p:cNvPr id="19" name="Right Arrow 18"/>
-          <p:cNvSpPr/>
-          <p:nvPr/>
-        </p:nvSpPr>
-        <p:spPr>
-          <a:xfrm>
-            <a:off x="9070848" y="2953512"/>
-            <a:ext cx="438912" cy="347472"/>
-          </a:xfrm>
-          <a:prstGeom prst="rightArrow">
-            <a:avLst/>
-          </a:prstGeom>
-          <a:solidFill>
-            <a:srgbClr val="DAE2E8"/>
-          </a:solidFill>
-          <a:ln>
-            <a:noFill/>
-          </a:ln>
-        </p:spPr>
-        <p:style>
-          <a:lnRef idx="1">
-            <a:schemeClr val="accent1"/>
-          </a:lnRef>
-          <a:fillRef idx="3">
-            <a:schemeClr val="accent1"/>
-          </a:fillRef>
-          <a:effectRef idx="2">
-            <a:schemeClr val="accent1"/>
-          </a:effectRef>
-          <a:fontRef idx="minor">
-            <a:schemeClr val="lt1"/>
-          </a:fontRef>
-        </p:style>
-        <p:txBody>
-          <a:bodyPr rtlCol="0" anchor="ctr"/>
-          <a:lstStyle/>
-          <a:p>
-            <a:pPr algn="ctr"/>
-          </a:p>
-        </p:txBody>
-      </p:sp>
-      <p:sp>
-        <p:nvSpPr>
-          <p:cNvPr id="20" name="Rounded Rectangle 19"/>
-          <p:cNvSpPr/>
-          <p:nvPr/>
-        </p:nvSpPr>
-        <p:spPr>
-          <a:xfrm>
-            <a:off x="9390888" y="2743200"/>
-            <a:ext cx="1874519" cy="777240"/>
-          </a:xfrm>
-          <a:prstGeom prst="roundRect">
-            <a:avLst/>
-          </a:prstGeom>
-          <a:solidFill>
-            <a:srgbClr val="142B43"/>
-          </a:solidFill>
-          <a:ln>
-            <a:noFill/>
-          </a:ln>
-        </p:spPr>
-        <p:style>
-          <a:lnRef idx="1">
-            <a:schemeClr val="accent1"/>
-          </a:lnRef>
-          <a:fillRef idx="3">
-            <a:schemeClr val="accent1"/>
-          </a:fillRef>
-          <a:effectRef idx="2">
-            <a:schemeClr val="accent1"/>
-          </a:effectRef>
-          <a:fontRef idx="minor">
-            <a:schemeClr val="lt1"/>
-          </a:fontRef>
-        </p:style>
-        <p:txBody>
-          <a:bodyPr rtlCol="0" anchor="ctr"/>
-          <a:lstStyle/>
-          <a:p>
-            <a:pPr algn="ctr"/>
-          </a:p>
-        </p:txBody>
-      </p:sp>
-      <p:sp>
-        <p:nvSpPr>
-          <p:cNvPr id="21" name="TextBox 20"/>
-          <p:cNvSpPr txBox="1"/>
-          <p:nvPr/>
-        </p:nvSpPr>
-        <p:spPr>
-          <a:xfrm>
-            <a:off x="9537192" y="2962656"/>
-            <a:ext cx="1600199" cy="274320"/>
-          </a:xfrm>
-          <a:prstGeom prst="rect">
-            <a:avLst/>
-          </a:prstGeom>
-          <a:noFill/>
-        </p:spPr>
-        <p:txBody>
-          <a:bodyPr wrap="square" anchor="t">
-            <a:spAutoFit/>
-          </a:bodyPr>
-          <a:lstStyle/>
-          <a:p>
-            <a:pPr algn="ctr"/>
-            <a:r>
-              <a:rPr sz="1500" b="1">
-                <a:solidFill>
-                  <a:srgbClr val="FFFFFF"/>
-                </a:solidFill>
-                <a:latin typeface="Microsoft YaHei"/>
-              </a:rPr>
-              <a:t>FAQ/RAG??</a:t>
+              <a:t>客户只需要理解一条主线：资料进来，系统建索引；用户提问，系统基于资料回答；管理员负责维护资料和权限。</a:t>
             </a:r>
           </a:p>
         </p:txBody>
@@ -7377,8 +5923,8 @@
         </p:nvSpPr>
         <p:spPr>
           <a:xfrm>
-            <a:off x="594360" y="502920"/>
-            <a:ext cx="8138160" cy="438912"/>
+            <a:off x="594360" y="512064"/>
+            <a:ext cx="8595360" cy="438912"/>
           </a:xfrm>
           <a:prstGeom prst="rect">
             <a:avLst/>
@@ -7399,7 +5945,7 @@
                 </a:solidFill>
                 <a:latin typeface="Microsoft YaHei"/>
               </a:rPr>
-              <a:t>?????????</a:t>
+              <a:t>不同角色看到不同能力</a:t>
             </a:r>
           </a:p>
         </p:txBody>
@@ -7412,8 +5958,8 @@
         </p:nvSpPr>
         <p:spPr>
           <a:xfrm>
-            <a:off x="612648" y="950976"/>
-            <a:ext cx="8046720" cy="292608"/>
+            <a:off x="11018520" y="512064"/>
+            <a:ext cx="685800" cy="320040"/>
           </a:xfrm>
           <a:prstGeom prst="rect">
             <a:avLst/>
@@ -7426,15 +5972,15 @@
           </a:bodyPr>
           <a:lstStyle/>
           <a:p>
-            <a:pPr algn="l"/>
-            <a:r>
-              <a:rPr sz="1250" b="0">
+            <a:pPr algn="r"/>
+            <a:r>
+              <a:rPr sz="1400" b="1">
                 <a:solidFill>
                   <a:srgbClr val="657684"/>
                 </a:solidFill>
                 <a:latin typeface="Microsoft YaHei"/>
               </a:rPr>
-              <a:t>????????????</a:t>
+              <a:t>04</a:t>
             </a:r>
           </a:p>
         </p:txBody>
@@ -7447,43 +5993,8 @@
         </p:nvSpPr>
         <p:spPr>
           <a:xfrm>
-            <a:off x="11018520" y="502920"/>
-            <a:ext cx="685800" cy="320040"/>
-          </a:xfrm>
-          <a:prstGeom prst="rect">
-            <a:avLst/>
-          </a:prstGeom>
-          <a:noFill/>
-        </p:spPr>
-        <p:txBody>
-          <a:bodyPr wrap="square" anchor="t">
-            <a:spAutoFit/>
-          </a:bodyPr>
-          <a:lstStyle/>
-          <a:p>
-            <a:pPr algn="r"/>
-            <a:r>
-              <a:rPr sz="1400" b="1">
-                <a:solidFill>
-                  <a:srgbClr val="657684"/>
-                </a:solidFill>
-                <a:latin typeface="Microsoft YaHei"/>
-              </a:rPr>
-              <a:t>04</a:t>
-            </a:r>
-          </a:p>
-        </p:txBody>
-      </p:sp>
-      <p:sp>
-        <p:nvSpPr>
-          <p:cNvPr id="7" name="TextBox 6"/>
-          <p:cNvSpPr txBox="1"/>
-          <p:nvPr/>
-        </p:nvSpPr>
-        <p:spPr>
-          <a:xfrm>
-            <a:off x="713232" y="1481328"/>
-            <a:ext cx="5532120" cy="4297680"/>
+            <a:off x="713232" y="1417320"/>
+            <a:ext cx="5532120" cy="4389120"/>
           </a:xfrm>
           <a:prstGeom prst="rect">
             <a:avLst/>
@@ -7508,7 +6019,7 @@
               </a:defRPr>
             </a:pPr>
             <a:r>
-              <a:t>????????????????????</a:t>
+              <a:t>普通用户：登录、提问、查看自己权限范围内的知识答案</a:t>
             </a:r>
           </a:p>
           <a:p>
@@ -7524,7 +6035,7 @@
               </a:defRPr>
             </a:pPr>
             <a:r>
-              <a:t>???????????????????????????</a:t>
+              <a:t>业务管理员：维护知识资料、上传文档、重建索引</a:t>
             </a:r>
           </a:p>
           <a:p>
@@ -7540,7 +6051,7 @@
               </a:defRPr>
             </a:pPr>
             <a:r>
-              <a:t>????????????????????????</a:t>
+              <a:t>系统管理员：维护用户、知识源权限、组织和菜单角色</a:t>
             </a:r>
           </a:p>
           <a:p>
@@ -7556,21 +6067,21 @@
               </a:defRPr>
             </a:pPr>
             <a:r>
-              <a:t>?????????????????????</a:t>
-            </a:r>
-          </a:p>
-        </p:txBody>
-      </p:sp>
-      <p:sp>
-        <p:nvSpPr>
-          <p:cNvPr id="8" name="Rounded Rectangle 7"/>
+              <a:t>审计查看者：查看关键操作记录，辅助追踪问题</a:t>
+            </a:r>
+          </a:p>
+        </p:txBody>
+      </p:sp>
+      <p:sp>
+        <p:nvSpPr>
+          <p:cNvPr id="7" name="Rounded Rectangle 6"/>
           <p:cNvSpPr/>
           <p:nvPr/>
         </p:nvSpPr>
         <p:spPr>
           <a:xfrm>
-            <a:off x="6492240" y="1828800"/>
-            <a:ext cx="4480560" cy="603504"/>
+            <a:off x="6629400" y="1417320"/>
+            <a:ext cx="4709160" cy="4389120"/>
           </a:xfrm>
           <a:prstGeom prst="roundRect">
             <a:avLst/>
@@ -7578,7 +6089,7 @@
           <a:solidFill>
             <a:srgbClr val="FFFFFF"/>
           </a:solidFill>
-          <a:ln>
+          <a:ln w="12700">
             <a:solidFill>
               <a:srgbClr val="DAE2E8"/>
             </a:solidFill>
@@ -7608,14 +6119,14 @@
       </p:sp>
       <p:sp>
         <p:nvSpPr>
-          <p:cNvPr id="9" name="TextBox 8"/>
+          <p:cNvPr id="8" name="TextBox 7"/>
           <p:cNvSpPr txBox="1"/>
           <p:nvPr/>
         </p:nvSpPr>
         <p:spPr>
           <a:xfrm>
-            <a:off x="6720840" y="1956816"/>
-            <a:ext cx="1417320" cy="219456"/>
+            <a:off x="6949440" y="1709928"/>
+            <a:ext cx="4069080" cy="310896"/>
           </a:xfrm>
           <a:prstGeom prst="rect">
             <a:avLst/>
@@ -7630,73 +6141,36 @@
           <a:p>
             <a:pPr algn="l"/>
             <a:r>
-              <a:rPr sz="1250" b="1">
+              <a:rPr sz="1500" b="1">
                 <a:solidFill>
                   <a:srgbClr val="142B43"/>
                 </a:solidFill>
                 <a:latin typeface="Microsoft YaHei"/>
               </a:rPr>
-              <a:t>????</a:t>
-            </a:r>
-          </a:p>
-        </p:txBody>
-      </p:sp>
-      <p:sp>
-        <p:nvSpPr>
-          <p:cNvPr id="10" name="TextBox 9"/>
-          <p:cNvSpPr txBox="1"/>
-          <p:nvPr/>
-        </p:nvSpPr>
-        <p:spPr>
-          <a:xfrm>
-            <a:off x="8229600" y="1956816"/>
-            <a:ext cx="2560320" cy="219456"/>
-          </a:xfrm>
-          <a:prstGeom prst="rect">
-            <a:avLst/>
-          </a:prstGeom>
-          <a:noFill/>
-        </p:spPr>
-        <p:txBody>
-          <a:bodyPr wrap="square" anchor="t">
-            <a:spAutoFit/>
-          </a:bodyPr>
-          <a:lstStyle/>
-          <a:p>
-            <a:pPr algn="l"/>
-            <a:r>
-              <a:rPr sz="1150" b="0">
-                <a:solidFill>
-                  <a:srgbClr val="26343F"/>
-                </a:solidFill>
-                <a:latin typeface="Microsoft YaHei"/>
-              </a:rPr>
-              <a:t>?????????</a:t>
-            </a:r>
-          </a:p>
-        </p:txBody>
-      </p:sp>
-      <p:sp>
-        <p:nvSpPr>
-          <p:cNvPr id="11" name="Rounded Rectangle 10"/>
+              <a:t>讲解提示</a:t>
+            </a:r>
+          </a:p>
+        </p:txBody>
+      </p:sp>
+      <p:sp>
+        <p:nvSpPr>
+          <p:cNvPr id="9" name="Oval 8"/>
           <p:cNvSpPr/>
           <p:nvPr/>
         </p:nvSpPr>
         <p:spPr>
           <a:xfrm>
-            <a:off x="6492240" y="2651760"/>
-            <a:ext cx="4480560" cy="603504"/>
-          </a:xfrm>
-          <a:prstGeom prst="roundRect">
+            <a:off x="6958584" y="2286000"/>
+            <a:ext cx="146304" cy="146304"/>
+          </a:xfrm>
+          <a:prstGeom prst="ellipse">
             <a:avLst/>
           </a:prstGeom>
           <a:solidFill>
-            <a:srgbClr val="FFFFFF"/>
+            <a:srgbClr val="409669"/>
           </a:solidFill>
           <a:ln>
-            <a:solidFill>
-              <a:srgbClr val="DAE2E8"/>
-            </a:solidFill>
+            <a:noFill/>
           </a:ln>
         </p:spPr>
         <p:style>
@@ -7723,14 +6197,14 @@
       </p:sp>
       <p:sp>
         <p:nvSpPr>
-          <p:cNvPr id="12" name="TextBox 11"/>
+          <p:cNvPr id="10" name="TextBox 9"/>
           <p:cNvSpPr txBox="1"/>
           <p:nvPr/>
         </p:nvSpPr>
         <p:spPr>
           <a:xfrm>
-            <a:off x="6720840" y="2779776"/>
-            <a:ext cx="1417320" cy="219456"/>
+            <a:off x="7223760" y="2221992"/>
+            <a:ext cx="3794760" cy="411480"/>
           </a:xfrm>
           <a:prstGeom prst="rect">
             <a:avLst/>
@@ -7745,278 +6219,13 @@
           <a:p>
             <a:pPr algn="l"/>
             <a:r>
-              <a:rPr sz="1250" b="1">
-                <a:solidFill>
-                  <a:srgbClr val="142B43"/>
+              <a:rPr sz="1250" b="0">
+                <a:solidFill>
+                  <a:srgbClr val="26343F"/>
                 </a:solidFill>
                 <a:latin typeface="Microsoft YaHei"/>
               </a:rPr>
-              <a:t>??????</a:t>
-            </a:r>
-          </a:p>
-        </p:txBody>
-      </p:sp>
-      <p:sp>
-        <p:nvSpPr>
-          <p:cNvPr id="13" name="TextBox 12"/>
-          <p:cNvSpPr txBox="1"/>
-          <p:nvPr/>
-        </p:nvSpPr>
-        <p:spPr>
-          <a:xfrm>
-            <a:off x="8229600" y="2779776"/>
-            <a:ext cx="2560320" cy="219456"/>
-          </a:xfrm>
-          <a:prstGeom prst="rect">
-            <a:avLst/>
-          </a:prstGeom>
-          <a:noFill/>
-        </p:spPr>
-        <p:txBody>
-          <a:bodyPr wrap="square" anchor="t">
-            <a:spAutoFit/>
-          </a:bodyPr>
-          <a:lstStyle/>
-          <a:p>
-            <a:pPr algn="l"/>
-            <a:r>
-              <a:rPr sz="1150" b="0">
-                <a:solidFill>
-                  <a:srgbClr val="26343F"/>
-                </a:solidFill>
-                <a:latin typeface="Microsoft YaHei"/>
-              </a:rPr>
-              <a:t>?????????????</a:t>
-            </a:r>
-          </a:p>
-        </p:txBody>
-      </p:sp>
-      <p:sp>
-        <p:nvSpPr>
-          <p:cNvPr id="14" name="Rounded Rectangle 13"/>
-          <p:cNvSpPr/>
-          <p:nvPr/>
-        </p:nvSpPr>
-        <p:spPr>
-          <a:xfrm>
-            <a:off x="6492240" y="3474720"/>
-            <a:ext cx="4480560" cy="603504"/>
-          </a:xfrm>
-          <a:prstGeom prst="roundRect">
-            <a:avLst/>
-          </a:prstGeom>
-          <a:solidFill>
-            <a:srgbClr val="FFFFFF"/>
-          </a:solidFill>
-          <a:ln>
-            <a:solidFill>
-              <a:srgbClr val="DAE2E8"/>
-            </a:solidFill>
-          </a:ln>
-        </p:spPr>
-        <p:style>
-          <a:lnRef idx="1">
-            <a:schemeClr val="accent1"/>
-          </a:lnRef>
-          <a:fillRef idx="3">
-            <a:schemeClr val="accent1"/>
-          </a:fillRef>
-          <a:effectRef idx="2">
-            <a:schemeClr val="accent1"/>
-          </a:effectRef>
-          <a:fontRef idx="minor">
-            <a:schemeClr val="lt1"/>
-          </a:fontRef>
-        </p:style>
-        <p:txBody>
-          <a:bodyPr rtlCol="0" anchor="ctr"/>
-          <a:lstStyle/>
-          <a:p>
-            <a:pPr algn="ctr"/>
-          </a:p>
-        </p:txBody>
-      </p:sp>
-      <p:sp>
-        <p:nvSpPr>
-          <p:cNvPr id="15" name="TextBox 14"/>
-          <p:cNvSpPr txBox="1"/>
-          <p:nvPr/>
-        </p:nvSpPr>
-        <p:spPr>
-          <a:xfrm>
-            <a:off x="6720840" y="3602736"/>
-            <a:ext cx="1417320" cy="219456"/>
-          </a:xfrm>
-          <a:prstGeom prst="rect">
-            <a:avLst/>
-          </a:prstGeom>
-          <a:noFill/>
-        </p:spPr>
-        <p:txBody>
-          <a:bodyPr wrap="square" anchor="t">
-            <a:spAutoFit/>
-          </a:bodyPr>
-          <a:lstStyle/>
-          <a:p>
-            <a:pPr algn="l"/>
-            <a:r>
-              <a:rPr sz="1250" b="1">
-                <a:solidFill>
-                  <a:srgbClr val="142B43"/>
-                </a:solidFill>
-                <a:latin typeface="Microsoft YaHei"/>
-              </a:rPr>
-              <a:t>?????</a:t>
-            </a:r>
-          </a:p>
-        </p:txBody>
-      </p:sp>
-      <p:sp>
-        <p:nvSpPr>
-          <p:cNvPr id="16" name="TextBox 15"/>
-          <p:cNvSpPr txBox="1"/>
-          <p:nvPr/>
-        </p:nvSpPr>
-        <p:spPr>
-          <a:xfrm>
-            <a:off x="8229600" y="3602736"/>
-            <a:ext cx="2560320" cy="219456"/>
-          </a:xfrm>
-          <a:prstGeom prst="rect">
-            <a:avLst/>
-          </a:prstGeom>
-          <a:noFill/>
-        </p:spPr>
-        <p:txBody>
-          <a:bodyPr wrap="square" anchor="t">
-            <a:spAutoFit/>
-          </a:bodyPr>
-          <a:lstStyle/>
-          <a:p>
-            <a:pPr algn="l"/>
-            <a:r>
-              <a:rPr sz="1150" b="0">
-                <a:solidFill>
-                  <a:srgbClr val="26343F"/>
-                </a:solidFill>
-                <a:latin typeface="Microsoft YaHei"/>
-              </a:rPr>
-              <a:t>???????????</a:t>
-            </a:r>
-          </a:p>
-        </p:txBody>
-      </p:sp>
-      <p:sp>
-        <p:nvSpPr>
-          <p:cNvPr id="17" name="Rounded Rectangle 16"/>
-          <p:cNvSpPr/>
-          <p:nvPr/>
-        </p:nvSpPr>
-        <p:spPr>
-          <a:xfrm>
-            <a:off x="6492240" y="4297680"/>
-            <a:ext cx="4480560" cy="603504"/>
-          </a:xfrm>
-          <a:prstGeom prst="roundRect">
-            <a:avLst/>
-          </a:prstGeom>
-          <a:solidFill>
-            <a:srgbClr val="FFFFFF"/>
-          </a:solidFill>
-          <a:ln>
-            <a:solidFill>
-              <a:srgbClr val="DAE2E8"/>
-            </a:solidFill>
-          </a:ln>
-        </p:spPr>
-        <p:style>
-          <a:lnRef idx="1">
-            <a:schemeClr val="accent1"/>
-          </a:lnRef>
-          <a:fillRef idx="3">
-            <a:schemeClr val="accent1"/>
-          </a:fillRef>
-          <a:effectRef idx="2">
-            <a:schemeClr val="accent1"/>
-          </a:effectRef>
-          <a:fontRef idx="minor">
-            <a:schemeClr val="lt1"/>
-          </a:fontRef>
-        </p:style>
-        <p:txBody>
-          <a:bodyPr rtlCol="0" anchor="ctr"/>
-          <a:lstStyle/>
-          <a:p>
-            <a:pPr algn="ctr"/>
-          </a:p>
-        </p:txBody>
-      </p:sp>
-      <p:sp>
-        <p:nvSpPr>
-          <p:cNvPr id="18" name="TextBox 17"/>
-          <p:cNvSpPr txBox="1"/>
-          <p:nvPr/>
-        </p:nvSpPr>
-        <p:spPr>
-          <a:xfrm>
-            <a:off x="6720840" y="4425696"/>
-            <a:ext cx="1417320" cy="219456"/>
-          </a:xfrm>
-          <a:prstGeom prst="rect">
-            <a:avLst/>
-          </a:prstGeom>
-          <a:noFill/>
-        </p:spPr>
-        <p:txBody>
-          <a:bodyPr wrap="square" anchor="t">
-            <a:spAutoFit/>
-          </a:bodyPr>
-          <a:lstStyle/>
-          <a:p>
-            <a:pPr algn="l"/>
-            <a:r>
-              <a:rPr sz="1250" b="1">
-                <a:solidFill>
-                  <a:srgbClr val="142B43"/>
-                </a:solidFill>
-                <a:latin typeface="Microsoft YaHei"/>
-              </a:rPr>
-              <a:t>?????</a:t>
-            </a:r>
-          </a:p>
-        </p:txBody>
-      </p:sp>
-      <p:sp>
-        <p:nvSpPr>
-          <p:cNvPr id="19" name="TextBox 18"/>
-          <p:cNvSpPr txBox="1"/>
-          <p:nvPr/>
-        </p:nvSpPr>
-        <p:spPr>
-          <a:xfrm>
-            <a:off x="8229600" y="4425696"/>
-            <a:ext cx="2560320" cy="219456"/>
-          </a:xfrm>
-          <a:prstGeom prst="rect">
-            <a:avLst/>
-          </a:prstGeom>
-          <a:noFill/>
-        </p:spPr>
-        <p:txBody>
-          <a:bodyPr wrap="square" anchor="t">
-            <a:spAutoFit/>
-          </a:bodyPr>
-          <a:lstStyle/>
-          <a:p>
-            <a:pPr algn="l"/>
-            <a:r>
-              <a:rPr sz="1150" b="0">
-                <a:solidFill>
-                  <a:srgbClr val="26343F"/>
-                </a:solidFill>
-                <a:latin typeface="Microsoft YaHei"/>
-              </a:rPr>
-              <a:t>????????</a:t>
+              <a:t>强调权限边界。客户通常会关心“普通员工会不会看到不该看的资料”，这里要说明系统按账号和知识源控制访问范围。</a:t>
             </a:r>
           </a:p>
         </p:txBody>
@@ -8141,8 +6350,8 @@
         </p:nvSpPr>
         <p:spPr>
           <a:xfrm>
-            <a:off x="594360" y="502920"/>
-            <a:ext cx="8138160" cy="438912"/>
+            <a:off x="594360" y="512064"/>
+            <a:ext cx="8595360" cy="438912"/>
           </a:xfrm>
           <a:prstGeom prst="rect">
             <a:avLst/>
@@ -8163,7 +6372,7 @@
                 </a:solidFill>
                 <a:latin typeface="Microsoft YaHei"/>
               </a:rPr>
-              <a:t>?????</a:t>
+              <a:t>从登录开始使用</a:t>
             </a:r>
           </a:p>
         </p:txBody>
@@ -8176,8 +6385,8 @@
         </p:nvSpPr>
         <p:spPr>
           <a:xfrm>
-            <a:off x="612648" y="950976"/>
-            <a:ext cx="8046720" cy="292608"/>
+            <a:off x="11018520" y="512064"/>
+            <a:ext cx="685800" cy="320040"/>
           </a:xfrm>
           <a:prstGeom prst="rect">
             <a:avLst/>
@@ -8190,15 +6399,15 @@
           </a:bodyPr>
           <a:lstStyle/>
           <a:p>
-            <a:pPr algn="l"/>
-            <a:r>
-              <a:rPr sz="1250" b="0">
+            <a:pPr algn="r"/>
+            <a:r>
+              <a:rPr sz="1400" b="1">
                 <a:solidFill>
                   <a:srgbClr val="657684"/>
                 </a:solidFill>
                 <a:latin typeface="Microsoft YaHei"/>
               </a:rPr>
-              <a:t>?????????</a:t>
+              <a:t>05</a:t>
             </a:r>
           </a:p>
         </p:txBody>
@@ -8211,43 +6420,8 @@
         </p:nvSpPr>
         <p:spPr>
           <a:xfrm>
-            <a:off x="11018520" y="502920"/>
-            <a:ext cx="685800" cy="320040"/>
-          </a:xfrm>
-          <a:prstGeom prst="rect">
-            <a:avLst/>
-          </a:prstGeom>
-          <a:noFill/>
-        </p:spPr>
-        <p:txBody>
-          <a:bodyPr wrap="square" anchor="t">
-            <a:spAutoFit/>
-          </a:bodyPr>
-          <a:lstStyle/>
-          <a:p>
-            <a:pPr algn="r"/>
-            <a:r>
-              <a:rPr sz="1400" b="1">
-                <a:solidFill>
-                  <a:srgbClr val="657684"/>
-                </a:solidFill>
-                <a:latin typeface="Microsoft YaHei"/>
-              </a:rPr>
-              <a:t>05</a:t>
-            </a:r>
-          </a:p>
-        </p:txBody>
-      </p:sp>
-      <p:sp>
-        <p:nvSpPr>
-          <p:cNvPr id="7" name="TextBox 6"/>
-          <p:cNvSpPr txBox="1"/>
-          <p:nvPr/>
-        </p:nvSpPr>
-        <p:spPr>
-          <a:xfrm>
-            <a:off x="713232" y="1481328"/>
-            <a:ext cx="5532120" cy="4297680"/>
+            <a:off x="713232" y="1417320"/>
+            <a:ext cx="5532120" cy="4389120"/>
           </a:xfrm>
           <a:prstGeom prst="rect">
             <a:avLst/>
@@ -8272,7 +6446,7 @@
               </a:defRPr>
             </a:pPr>
             <a:r>
-              <a:t>????????????</a:t>
+              <a:t>用户通过账号密码登录系统</a:t>
             </a:r>
           </a:p>
           <a:p>
@@ -8288,7 +6462,7 @@
               </a:defRPr>
             </a:pPr>
             <a:r>
-              <a:t>?????????????????</a:t>
+              <a:t>登录后显示当前用户身份和可访问能力</a:t>
             </a:r>
           </a:p>
           <a:p>
@@ -8304,7 +6478,7 @@
               </a:defRPr>
             </a:pPr>
             <a:r>
-              <a:t>???????????????????</a:t>
+              <a:t>管理员可以创建账号、重置密码、禁用账号</a:t>
             </a:r>
           </a:p>
           <a:p>
@@ -8320,20 +6494,20 @@
               </a:defRPr>
             </a:pPr>
             <a:r>
-              <a:t>??????????????????</a:t>
-            </a:r>
-          </a:p>
-        </p:txBody>
-      </p:sp>
-      <p:sp>
-        <p:nvSpPr>
-          <p:cNvPr id="8" name="Rounded Rectangle 7"/>
+              <a:t>不同权限用户进入系统后看到的菜单会不同</a:t>
+            </a:r>
+          </a:p>
+        </p:txBody>
+      </p:sp>
+      <p:sp>
+        <p:nvSpPr>
+          <p:cNvPr id="7" name="Rounded Rectangle 6"/>
           <p:cNvSpPr/>
           <p:nvPr/>
         </p:nvSpPr>
         <p:spPr>
           <a:xfrm>
-            <a:off x="6629400" y="1481328"/>
+            <a:off x="6629400" y="1417320"/>
             <a:ext cx="4709160" cy="4389120"/>
           </a:xfrm>
           <a:prstGeom prst="roundRect">
@@ -8372,13 +6546,13 @@
       </p:sp>
       <p:sp>
         <p:nvSpPr>
-          <p:cNvPr id="9" name="TextBox 8"/>
+          <p:cNvPr id="8" name="TextBox 7"/>
           <p:cNvSpPr txBox="1"/>
           <p:nvPr/>
         </p:nvSpPr>
         <p:spPr>
           <a:xfrm>
-            <a:off x="6949440" y="1773936"/>
+            <a:off x="6949440" y="1709928"/>
             <a:ext cx="4069080" cy="310896"/>
           </a:xfrm>
           <a:prstGeom prst="rect">
@@ -8400,20 +6574,20 @@
                 </a:solidFill>
                 <a:latin typeface="Microsoft YaHei"/>
               </a:rPr>
-              <a:t>????</a:t>
-            </a:r>
-          </a:p>
-        </p:txBody>
-      </p:sp>
-      <p:sp>
-        <p:nvSpPr>
-          <p:cNvPr id="10" name="Oval 9"/>
+              <a:t>演示动作</a:t>
+            </a:r>
+          </a:p>
+        </p:txBody>
+      </p:sp>
+      <p:sp>
+        <p:nvSpPr>
+          <p:cNvPr id="9" name="Oval 8"/>
           <p:cNvSpPr/>
           <p:nvPr/>
         </p:nvSpPr>
         <p:spPr>
           <a:xfrm>
-            <a:off x="6958584" y="2350008"/>
+            <a:off x="6958584" y="2286000"/>
             <a:ext cx="146304" cy="146304"/>
           </a:xfrm>
           <a:prstGeom prst="ellipse">
@@ -8450,13 +6624,13 @@
       </p:sp>
       <p:sp>
         <p:nvSpPr>
-          <p:cNvPr id="11" name="TextBox 10"/>
+          <p:cNvPr id="10" name="TextBox 9"/>
           <p:cNvSpPr txBox="1"/>
           <p:nvPr/>
         </p:nvSpPr>
         <p:spPr>
           <a:xfrm>
-            <a:off x="7223760" y="2286000"/>
+            <a:off x="7223760" y="2221992"/>
             <a:ext cx="3794760" cy="411480"/>
           </a:xfrm>
           <a:prstGeom prst="rect">
@@ -8478,20 +6652,20 @@
                 </a:solidFill>
                 <a:latin typeface="Microsoft YaHei"/>
               </a:rPr>
-              <a:t>?? /login</a:t>
-            </a:r>
-          </a:p>
-        </p:txBody>
-      </p:sp>
-      <p:sp>
-        <p:nvSpPr>
-          <p:cNvPr id="12" name="Oval 11"/>
+              <a:t>打开 /login</a:t>
+            </a:r>
+          </a:p>
+        </p:txBody>
+      </p:sp>
+      <p:sp>
+        <p:nvSpPr>
+          <p:cNvPr id="11" name="Oval 10"/>
           <p:cNvSpPr/>
           <p:nvPr/>
         </p:nvSpPr>
         <p:spPr>
           <a:xfrm>
-            <a:off x="6958584" y="3008376"/>
+            <a:off x="6958584" y="2944368"/>
             <a:ext cx="146304" cy="146304"/>
           </a:xfrm>
           <a:prstGeom prst="ellipse">
@@ -8528,13 +6702,13 @@
       </p:sp>
       <p:sp>
         <p:nvSpPr>
-          <p:cNvPr id="13" name="TextBox 12"/>
+          <p:cNvPr id="12" name="TextBox 11"/>
           <p:cNvSpPr txBox="1"/>
           <p:nvPr/>
         </p:nvSpPr>
         <p:spPr>
           <a:xfrm>
-            <a:off x="7223760" y="2944368"/>
+            <a:off x="7223760" y="2880360"/>
             <a:ext cx="3794760" cy="411480"/>
           </a:xfrm>
           <a:prstGeom prst="rect">
@@ -8556,20 +6730,20 @@
                 </a:solidFill>
                 <a:latin typeface="Microsoft YaHei"/>
               </a:rPr>
-              <a:t>??????</a:t>
-            </a:r>
-          </a:p>
-        </p:txBody>
-      </p:sp>
-      <p:sp>
-        <p:nvSpPr>
-          <p:cNvPr id="14" name="Oval 13"/>
+              <a:t>输入账号密码</a:t>
+            </a:r>
+          </a:p>
+        </p:txBody>
+      </p:sp>
+      <p:sp>
+        <p:nvSpPr>
+          <p:cNvPr id="13" name="Oval 12"/>
           <p:cNvSpPr/>
           <p:nvPr/>
         </p:nvSpPr>
         <p:spPr>
           <a:xfrm>
-            <a:off x="6958584" y="3666744"/>
+            <a:off x="6958584" y="3602736"/>
             <a:ext cx="146304" cy="146304"/>
           </a:xfrm>
           <a:prstGeom prst="ellipse">
@@ -8606,13 +6780,13 @@
       </p:sp>
       <p:sp>
         <p:nvSpPr>
-          <p:cNvPr id="15" name="TextBox 14"/>
+          <p:cNvPr id="14" name="TextBox 13"/>
           <p:cNvSpPr txBox="1"/>
           <p:nvPr/>
         </p:nvSpPr>
         <p:spPr>
           <a:xfrm>
-            <a:off x="7223760" y="3602736"/>
+            <a:off x="7223760" y="3538728"/>
             <a:ext cx="3794760" cy="411480"/>
           </a:xfrm>
           <a:prstGeom prst="rect">
@@ -8634,20 +6808,20 @@
                 </a:solidFill>
                 <a:latin typeface="Microsoft YaHei"/>
               </a:rPr>
-              <a:t>????????</a:t>
-            </a:r>
-          </a:p>
-        </p:txBody>
-      </p:sp>
-      <p:sp>
-        <p:nvSpPr>
-          <p:cNvPr id="16" name="Oval 15"/>
+              <a:t>进入首页或问答页</a:t>
+            </a:r>
+          </a:p>
+        </p:txBody>
+      </p:sp>
+      <p:sp>
+        <p:nvSpPr>
+          <p:cNvPr id="15" name="Oval 14"/>
           <p:cNvSpPr/>
           <p:nvPr/>
         </p:nvSpPr>
         <p:spPr>
           <a:xfrm>
-            <a:off x="6958584" y="4325112"/>
+            <a:off x="6958584" y="4261104"/>
             <a:ext cx="146304" cy="146304"/>
           </a:xfrm>
           <a:prstGeom prst="ellipse">
@@ -8684,13 +6858,13 @@
       </p:sp>
       <p:sp>
         <p:nvSpPr>
-          <p:cNvPr id="17" name="TextBox 16"/>
+          <p:cNvPr id="16" name="TextBox 15"/>
           <p:cNvSpPr txBox="1"/>
           <p:nvPr/>
         </p:nvSpPr>
         <p:spPr>
           <a:xfrm>
-            <a:off x="7223760" y="4261104"/>
+            <a:off x="7223760" y="4197096"/>
             <a:ext cx="3794760" cy="411480"/>
           </a:xfrm>
           <a:prstGeom prst="rect">
@@ -8712,7 +6886,7 @@
                 </a:solidFill>
                 <a:latin typeface="Microsoft YaHei"/>
               </a:rPr>
-              <a:t>????????</a:t>
+              <a:t>展示当前用户身份</a:t>
             </a:r>
           </a:p>
         </p:txBody>
@@ -8837,8 +7011,8 @@
         </p:nvSpPr>
         <p:spPr>
           <a:xfrm>
-            <a:off x="594360" y="502920"/>
-            <a:ext cx="8138160" cy="438912"/>
+            <a:off x="594360" y="512064"/>
+            <a:ext cx="8595360" cy="438912"/>
           </a:xfrm>
           <a:prstGeom prst="rect">
             <a:avLst/>
@@ -8859,7 +7033,7 @@
                 </a:solidFill>
                 <a:latin typeface="Microsoft YaHei"/>
               </a:rPr>
-              <a:t>???????</a:t>
+              <a:t>像问同事一样查询资料</a:t>
             </a:r>
           </a:p>
         </p:txBody>
@@ -8872,8 +7046,8 @@
         </p:nvSpPr>
         <p:spPr>
           <a:xfrm>
-            <a:off x="612648" y="950976"/>
-            <a:ext cx="8046720" cy="292608"/>
+            <a:off x="11018520" y="512064"/>
+            <a:ext cx="685800" cy="320040"/>
           </a:xfrm>
           <a:prstGeom prst="rect">
             <a:avLst/>
@@ -8886,15 +7060,15 @@
           </a:bodyPr>
           <a:lstStyle/>
           <a:p>
-            <a:pPr algn="l"/>
-            <a:r>
-              <a:rPr sz="1250" b="0">
+            <a:pPr algn="r"/>
+            <a:r>
+              <a:rPr sz="1400" b="1">
                 <a:solidFill>
                   <a:srgbClr val="657684"/>
                 </a:solidFill>
                 <a:latin typeface="Microsoft YaHei"/>
               </a:rPr>
-              <a:t>??????????</a:t>
+              <a:t>06</a:t>
             </a:r>
           </a:p>
         </p:txBody>
@@ -8907,43 +7081,8 @@
         </p:nvSpPr>
         <p:spPr>
           <a:xfrm>
-            <a:off x="11018520" y="502920"/>
-            <a:ext cx="685800" cy="320040"/>
-          </a:xfrm>
-          <a:prstGeom prst="rect">
-            <a:avLst/>
-          </a:prstGeom>
-          <a:noFill/>
-        </p:spPr>
-        <p:txBody>
-          <a:bodyPr wrap="square" anchor="t">
-            <a:spAutoFit/>
-          </a:bodyPr>
-          <a:lstStyle/>
-          <a:p>
-            <a:pPr algn="r"/>
-            <a:r>
-              <a:rPr sz="1400" b="1">
-                <a:solidFill>
-                  <a:srgbClr val="657684"/>
-                </a:solidFill>
-                <a:latin typeface="Microsoft YaHei"/>
-              </a:rPr>
-              <a:t>06</a:t>
-            </a:r>
-          </a:p>
-        </p:txBody>
-      </p:sp>
-      <p:sp>
-        <p:nvSpPr>
-          <p:cNvPr id="7" name="TextBox 6"/>
-          <p:cNvSpPr txBox="1"/>
-          <p:nvPr/>
-        </p:nvSpPr>
-        <p:spPr>
-          <a:xfrm>
-            <a:off x="713232" y="1481328"/>
-            <a:ext cx="5532120" cy="4297680"/>
+            <a:off x="713232" y="1417320"/>
+            <a:ext cx="5532120" cy="4389120"/>
           </a:xfrm>
           <a:prstGeom prst="rect">
             <a:avLst/>
@@ -8968,7 +7107,7 @@
               </a:defRPr>
             </a:pPr>
             <a:r>
-              <a:t>????????????</a:t>
+              <a:t>用户可以直接输入自然语言问题</a:t>
             </a:r>
           </a:p>
           <a:p>
@@ -8984,7 +7123,7 @@
               </a:defRPr>
             </a:pPr>
             <a:r>
-              <a:t>?????? FAQ?????????</a:t>
+              <a:t>系统优先匹配 FAQ，减少重复问答成本</a:t>
             </a:r>
           </a:p>
           <a:p>
@@ -9000,7 +7139,7 @@
               </a:defRPr>
             </a:pPr>
             <a:r>
-              <a:t>FAQ ????????????????????</a:t>
+              <a:t>FAQ 未命中时，系统会从知识库检索相关片段并生成回答</a:t>
             </a:r>
           </a:p>
           <a:p>
@@ -9016,7 +7155,7 @@
               </a:defRPr>
             </a:pPr>
             <a:r>
-              <a:t>????????????????</a:t>
+              <a:t>回答可带引用来源，便于用户判断可信度</a:t>
             </a:r>
           </a:p>
           <a:p>
@@ -9032,20 +7171,20 @@
               </a:defRPr>
             </a:pPr>
             <a:r>
-              <a:t>?????????????</a:t>
-            </a:r>
-          </a:p>
-        </p:txBody>
-      </p:sp>
-      <p:sp>
-        <p:nvSpPr>
-          <p:cNvPr id="8" name="Rounded Rectangle 7"/>
+              <a:t>支持会话历史，适合连续追问</a:t>
+            </a:r>
+          </a:p>
+        </p:txBody>
+      </p:sp>
+      <p:sp>
+        <p:nvSpPr>
+          <p:cNvPr id="7" name="Rounded Rectangle 6"/>
           <p:cNvSpPr/>
           <p:nvPr/>
         </p:nvSpPr>
         <p:spPr>
           <a:xfrm>
-            <a:off x="6629400" y="1481328"/>
+            <a:off x="6629400" y="1417320"/>
             <a:ext cx="4709160" cy="4389120"/>
           </a:xfrm>
           <a:prstGeom prst="roundRect">
@@ -9084,13 +7223,13 @@
       </p:sp>
       <p:sp>
         <p:nvSpPr>
-          <p:cNvPr id="9" name="TextBox 8"/>
+          <p:cNvPr id="8" name="TextBox 7"/>
           <p:cNvSpPr txBox="1"/>
           <p:nvPr/>
         </p:nvSpPr>
         <p:spPr>
           <a:xfrm>
-            <a:off x="6949440" y="1773936"/>
+            <a:off x="6949440" y="1709928"/>
             <a:ext cx="4069080" cy="310896"/>
           </a:xfrm>
           <a:prstGeom prst="rect">
@@ -9112,20 +7251,20 @@
                 </a:solidFill>
                 <a:latin typeface="Microsoft YaHei"/>
               </a:rPr>
-              <a:t>????</a:t>
-            </a:r>
-          </a:p>
-        </p:txBody>
-      </p:sp>
-      <p:sp>
-        <p:nvSpPr>
-          <p:cNvPr id="10" name="Oval 9"/>
+              <a:t>演示动作</a:t>
+            </a:r>
+          </a:p>
+        </p:txBody>
+      </p:sp>
+      <p:sp>
+        <p:nvSpPr>
+          <p:cNvPr id="9" name="Oval 8"/>
           <p:cNvSpPr/>
           <p:nvPr/>
         </p:nvSpPr>
         <p:spPr>
           <a:xfrm>
-            <a:off x="6958584" y="2350008"/>
+            <a:off x="6958584" y="2286000"/>
             <a:ext cx="146304" cy="146304"/>
           </a:xfrm>
           <a:prstGeom prst="ellipse">
@@ -9162,13 +7301,13 @@
       </p:sp>
       <p:sp>
         <p:nvSpPr>
-          <p:cNvPr id="11" name="TextBox 10"/>
+          <p:cNvPr id="10" name="TextBox 9"/>
           <p:cNvSpPr txBox="1"/>
           <p:nvPr/>
         </p:nvSpPr>
         <p:spPr>
           <a:xfrm>
-            <a:off x="7223760" y="2286000"/>
+            <a:off x="7223760" y="2221992"/>
             <a:ext cx="3794760" cy="411480"/>
           </a:xfrm>
           <a:prstGeom prst="rect">
@@ -9190,20 +7329,20 @@
                 </a:solidFill>
                 <a:latin typeface="Microsoft YaHei"/>
               </a:rPr>
-              <a:t>?? /qa</a:t>
-            </a:r>
-          </a:p>
-        </p:txBody>
-      </p:sp>
-      <p:sp>
-        <p:nvSpPr>
-          <p:cNvPr id="12" name="Oval 11"/>
+              <a:t>进入 /qa</a:t>
+            </a:r>
+          </a:p>
+        </p:txBody>
+      </p:sp>
+      <p:sp>
+        <p:nvSpPr>
+          <p:cNvPr id="11" name="Oval 10"/>
           <p:cNvSpPr/>
           <p:nvPr/>
         </p:nvSpPr>
         <p:spPr>
           <a:xfrm>
-            <a:off x="6958584" y="3008376"/>
+            <a:off x="6958584" y="2944368"/>
             <a:ext cx="146304" cy="146304"/>
           </a:xfrm>
           <a:prstGeom prst="ellipse">
@@ -9240,13 +7379,13 @@
       </p:sp>
       <p:sp>
         <p:nvSpPr>
-          <p:cNvPr id="13" name="TextBox 12"/>
+          <p:cNvPr id="12" name="TextBox 11"/>
           <p:cNvSpPr txBox="1"/>
           <p:nvPr/>
         </p:nvSpPr>
         <p:spPr>
           <a:xfrm>
-            <a:off x="7223760" y="2944368"/>
+            <a:off x="7223760" y="2880360"/>
             <a:ext cx="3794760" cy="411480"/>
           </a:xfrm>
           <a:prstGeom prst="rect">
@@ -9268,20 +7407,20 @@
                 </a:solidFill>
                 <a:latin typeface="Microsoft YaHei"/>
               </a:rPr>
-              <a:t>??? FAQ ???</a:t>
-            </a:r>
-          </a:p>
-        </p:txBody>
-      </p:sp>
-      <p:sp>
-        <p:nvSpPr>
-          <p:cNvPr id="14" name="Oval 13"/>
+              <a:t>选择或确认知识源范围</a:t>
+            </a:r>
+          </a:p>
+        </p:txBody>
+      </p:sp>
+      <p:sp>
+        <p:nvSpPr>
+          <p:cNvPr id="13" name="Oval 12"/>
           <p:cNvSpPr/>
           <p:nvPr/>
         </p:nvSpPr>
         <p:spPr>
           <a:xfrm>
-            <a:off x="6958584" y="3666744"/>
+            <a:off x="6958584" y="3602736"/>
             <a:ext cx="146304" cy="146304"/>
           </a:xfrm>
           <a:prstGeom prst="ellipse">
@@ -9318,13 +7457,13 @@
       </p:sp>
       <p:sp>
         <p:nvSpPr>
-          <p:cNvPr id="15" name="TextBox 14"/>
+          <p:cNvPr id="14" name="TextBox 13"/>
           <p:cNvSpPr txBox="1"/>
           <p:nvPr/>
         </p:nvSpPr>
         <p:spPr>
           <a:xfrm>
-            <a:off x="7223760" y="3602736"/>
+            <a:off x="7223760" y="3538728"/>
             <a:ext cx="3794760" cy="411480"/>
           </a:xfrm>
           <a:prstGeom prst="rect">
@@ -9346,20 +7485,20 @@
                 </a:solidFill>
                 <a:latin typeface="Microsoft YaHei"/>
               </a:rPr>
-              <a:t>?????????</a:t>
-            </a:r>
-          </a:p>
-        </p:txBody>
-      </p:sp>
-      <p:sp>
-        <p:nvSpPr>
-          <p:cNvPr id="16" name="Oval 15"/>
+              <a:t>输入一个 FAQ 类问题</a:t>
+            </a:r>
+          </a:p>
+        </p:txBody>
+      </p:sp>
+      <p:sp>
+        <p:nvSpPr>
+          <p:cNvPr id="15" name="Oval 14"/>
           <p:cNvSpPr/>
           <p:nvPr/>
         </p:nvSpPr>
         <p:spPr>
           <a:xfrm>
-            <a:off x="6958584" y="4325112"/>
+            <a:off x="6958584" y="4261104"/>
             <a:ext cx="146304" cy="146304"/>
           </a:xfrm>
           <a:prstGeom prst="ellipse">
@@ -9396,13 +7535,13 @@
       </p:sp>
       <p:sp>
         <p:nvSpPr>
-          <p:cNvPr id="17" name="TextBox 16"/>
+          <p:cNvPr id="16" name="TextBox 15"/>
           <p:cNvSpPr txBox="1"/>
           <p:nvPr/>
         </p:nvSpPr>
         <p:spPr>
           <a:xfrm>
-            <a:off x="7223760" y="4261104"/>
+            <a:off x="7223760" y="4197096"/>
             <a:ext cx="3794760" cy="411480"/>
           </a:xfrm>
           <a:prstGeom prst="rect">
@@ -9424,7 +7563,85 @@
                 </a:solidFill>
                 <a:latin typeface="Microsoft YaHei"/>
               </a:rPr>
-              <a:t>????????????</a:t>
+              <a:t>再输入一个需要文档检索的问题</a:t>
+            </a:r>
+          </a:p>
+        </p:txBody>
+      </p:sp>
+      <p:sp>
+        <p:nvSpPr>
+          <p:cNvPr id="17" name="Oval 16"/>
+          <p:cNvSpPr/>
+          <p:nvPr/>
+        </p:nvSpPr>
+        <p:spPr>
+          <a:xfrm>
+            <a:off x="6958584" y="4919472"/>
+            <a:ext cx="146304" cy="146304"/>
+          </a:xfrm>
+          <a:prstGeom prst="ellipse">
+            <a:avLst/>
+          </a:prstGeom>
+          <a:solidFill>
+            <a:srgbClr val="EC8B40"/>
+          </a:solidFill>
+          <a:ln>
+            <a:noFill/>
+          </a:ln>
+        </p:spPr>
+        <p:style>
+          <a:lnRef idx="1">
+            <a:schemeClr val="accent1"/>
+          </a:lnRef>
+          <a:fillRef idx="3">
+            <a:schemeClr val="accent1"/>
+          </a:fillRef>
+          <a:effectRef idx="2">
+            <a:schemeClr val="accent1"/>
+          </a:effectRef>
+          <a:fontRef idx="minor">
+            <a:schemeClr val="lt1"/>
+          </a:fontRef>
+        </p:style>
+        <p:txBody>
+          <a:bodyPr rtlCol="0" anchor="ctr"/>
+          <a:lstStyle/>
+          <a:p>
+            <a:pPr algn="ctr"/>
+          </a:p>
+        </p:txBody>
+      </p:sp>
+      <p:sp>
+        <p:nvSpPr>
+          <p:cNvPr id="18" name="TextBox 17"/>
+          <p:cNvSpPr txBox="1"/>
+          <p:nvPr/>
+        </p:nvSpPr>
+        <p:spPr>
+          <a:xfrm>
+            <a:off x="7223760" y="4855464"/>
+            <a:ext cx="3794760" cy="411480"/>
+          </a:xfrm>
+          <a:prstGeom prst="rect">
+            <a:avLst/>
+          </a:prstGeom>
+          <a:noFill/>
+        </p:spPr>
+        <p:txBody>
+          <a:bodyPr wrap="square" anchor="t">
+            <a:spAutoFit/>
+          </a:bodyPr>
+          <a:lstStyle/>
+          <a:p>
+            <a:pPr algn="l"/>
+            <a:r>
+              <a:rPr sz="1250" b="0">
+                <a:solidFill>
+                  <a:srgbClr val="26343F"/>
+                </a:solidFill>
+                <a:latin typeface="Microsoft YaHei"/>
+              </a:rPr>
+              <a:t>展示答案、引用和会话连续性</a:t>
             </a:r>
           </a:p>
         </p:txBody>
@@ -9549,8 +7766,8 @@
         </p:nvSpPr>
         <p:spPr>
           <a:xfrm>
-            <a:off x="594360" y="502920"/>
-            <a:ext cx="8138160" cy="438912"/>
+            <a:off x="594360" y="512064"/>
+            <a:ext cx="8595360" cy="438912"/>
           </a:xfrm>
           <a:prstGeom prst="rect">
             <a:avLst/>
@@ -9571,7 +7788,7 @@
                 </a:solidFill>
                 <a:latin typeface="Microsoft YaHei"/>
               </a:rPr>
-              <a:t>FAQ + RAG ?????</a:t>
+              <a:t>管理员维护知识资料</a:t>
             </a:r>
           </a:p>
         </p:txBody>
@@ -9584,8 +7801,8 @@
         </p:nvSpPr>
         <p:spPr>
           <a:xfrm>
-            <a:off x="612648" y="950976"/>
-            <a:ext cx="8046720" cy="292608"/>
+            <a:off x="11018520" y="512064"/>
+            <a:ext cx="685800" cy="320040"/>
           </a:xfrm>
           <a:prstGeom prst="rect">
             <a:avLst/>
@@ -9598,15 +7815,15 @@
           </a:bodyPr>
           <a:lstStyle/>
           <a:p>
-            <a:pPr algn="l"/>
-            <a:r>
-              <a:rPr sz="1250" b="0">
+            <a:pPr algn="r"/>
+            <a:r>
+              <a:rPr sz="1400" b="1">
                 <a:solidFill>
                   <a:srgbClr val="657684"/>
                 </a:solidFill>
                 <a:latin typeface="Microsoft YaHei"/>
               </a:rPr>
-              <a:t>???????????????</a:t>
+              <a:t>07</a:t>
             </a:r>
           </a:p>
         </p:txBody>
@@ -9619,43 +7836,8 @@
         </p:nvSpPr>
         <p:spPr>
           <a:xfrm>
-            <a:off x="11018520" y="502920"/>
-            <a:ext cx="685800" cy="320040"/>
-          </a:xfrm>
-          <a:prstGeom prst="rect">
-            <a:avLst/>
-          </a:prstGeom>
-          <a:noFill/>
-        </p:spPr>
-        <p:txBody>
-          <a:bodyPr wrap="square" anchor="t">
-            <a:spAutoFit/>
-          </a:bodyPr>
-          <a:lstStyle/>
-          <a:p>
-            <a:pPr algn="r"/>
-            <a:r>
-              <a:rPr sz="1400" b="1">
-                <a:solidFill>
-                  <a:srgbClr val="657684"/>
-                </a:solidFill>
-                <a:latin typeface="Microsoft YaHei"/>
-              </a:rPr>
-              <a:t>07</a:t>
-            </a:r>
-          </a:p>
-        </p:txBody>
-      </p:sp>
-      <p:sp>
-        <p:nvSpPr>
-          <p:cNvPr id="7" name="TextBox 6"/>
-          <p:cNvSpPr txBox="1"/>
-          <p:nvPr/>
-        </p:nvSpPr>
-        <p:spPr>
-          <a:xfrm>
-            <a:off x="713232" y="1481328"/>
-            <a:ext cx="5532120" cy="4297680"/>
+            <a:off x="713232" y="1417320"/>
+            <a:ext cx="5532120" cy="4389120"/>
           </a:xfrm>
           <a:prstGeom prst="rect">
             <a:avLst/>
@@ -9680,7 +7862,7 @@
               </a:defRPr>
             </a:pPr>
             <a:r>
-              <a:t>FAQ ????????</a:t>
+              <a:t>支持上传文本、Markdown、HTML、PDF、Word、PPT 等常见文档</a:t>
             </a:r>
           </a:p>
           <a:p>
@@ -9696,7 +7878,7 @@
               </a:defRPr>
             </a:pPr>
             <a:r>
-              <a:t>RAG ???????????</a:t>
+              <a:t>支持单文件和多文件上传</a:t>
             </a:r>
           </a:p>
           <a:p>
@@ -9712,7 +7894,7 @@
               </a:defRPr>
             </a:pPr>
             <a:r>
-              <a:t>????????</a:t>
+              <a:t>上传后系统会保存文件并写入检索索引</a:t>
             </a:r>
           </a:p>
           <a:p>
@@ -9728,7 +7910,7 @@
               </a:defRPr>
             </a:pPr>
             <a:r>
-              <a:t>?????????????</a:t>
+              <a:t>管理员可以选择追加索引或替换指定知识源</a:t>
             </a:r>
           </a:p>
           <a:p>
@@ -9744,21 +7926,21 @@
               </a:defRPr>
             </a:pPr>
             <a:r>
-              <a:t>????????????????</a:t>
-            </a:r>
-          </a:p>
-        </p:txBody>
-      </p:sp>
-      <p:sp>
-        <p:nvSpPr>
-          <p:cNvPr id="8" name="Rounded Rectangle 7"/>
+              <a:t>上传结果会显示处理状态，方便排查失败文件</a:t>
+            </a:r>
+          </a:p>
+        </p:txBody>
+      </p:sp>
+      <p:sp>
+        <p:nvSpPr>
+          <p:cNvPr id="7" name="Rounded Rectangle 6"/>
           <p:cNvSpPr/>
           <p:nvPr/>
         </p:nvSpPr>
         <p:spPr>
           <a:xfrm>
-            <a:off x="6629400" y="1508760"/>
-            <a:ext cx="2057400" cy="3108960"/>
+            <a:off x="6629400" y="1417320"/>
+            <a:ext cx="4709160" cy="4389120"/>
           </a:xfrm>
           <a:prstGeom prst="roundRect">
             <a:avLst/>
@@ -9766,7 +7948,7 @@
           <a:solidFill>
             <a:srgbClr val="FFFFFF"/>
           </a:solidFill>
-          <a:ln>
+          <a:ln w="12700">
             <a:solidFill>
               <a:srgbClr val="DAE2E8"/>
             </a:solidFill>
@@ -9796,59 +7978,14 @@
       </p:sp>
       <p:sp>
         <p:nvSpPr>
-          <p:cNvPr id="9" name="Rounded Rectangle 8"/>
-          <p:cNvSpPr/>
-          <p:nvPr/>
-        </p:nvSpPr>
-        <p:spPr>
-          <a:xfrm>
-            <a:off x="9189720" y="1508760"/>
-            <a:ext cx="2057400" cy="3108960"/>
-          </a:xfrm>
-          <a:prstGeom prst="roundRect">
-            <a:avLst/>
-          </a:prstGeom>
-          <a:solidFill>
-            <a:srgbClr val="FFFFFF"/>
-          </a:solidFill>
-          <a:ln>
-            <a:solidFill>
-              <a:srgbClr val="DAE2E8"/>
-            </a:solidFill>
-          </a:ln>
-        </p:spPr>
-        <p:style>
-          <a:lnRef idx="1">
-            <a:schemeClr val="accent1"/>
-          </a:lnRef>
-          <a:fillRef idx="3">
-            <a:schemeClr val="accent1"/>
-          </a:fillRef>
-          <a:effectRef idx="2">
-            <a:schemeClr val="accent1"/>
-          </a:effectRef>
-          <a:fontRef idx="minor">
-            <a:schemeClr val="lt1"/>
-          </a:fontRef>
-        </p:style>
-        <p:txBody>
-          <a:bodyPr rtlCol="0" anchor="ctr"/>
-          <a:lstStyle/>
-          <a:p>
-            <a:pPr algn="ctr"/>
-          </a:p>
-        </p:txBody>
-      </p:sp>
-      <p:sp>
-        <p:nvSpPr>
-          <p:cNvPr id="10" name="TextBox 9"/>
+          <p:cNvPr id="8" name="TextBox 7"/>
           <p:cNvSpPr txBox="1"/>
           <p:nvPr/>
         </p:nvSpPr>
         <p:spPr>
           <a:xfrm>
-            <a:off x="6967728" y="1828800"/>
-            <a:ext cx="1325880" cy="411480"/>
+            <a:off x="6949440" y="1709928"/>
+            <a:ext cx="4069080" cy="310896"/>
           </a:xfrm>
           <a:prstGeom prst="rect">
             <a:avLst/>
@@ -9861,136 +7998,31 @@
           </a:bodyPr>
           <a:lstStyle/>
           <a:p>
-            <a:pPr algn="ctr"/>
-            <a:r>
-              <a:rPr sz="2600" b="1">
-                <a:solidFill>
-                  <a:srgbClr val="1877F2"/>
+            <a:pPr algn="l"/>
+            <a:r>
+              <a:rPr sz="1500" b="1">
+                <a:solidFill>
+                  <a:srgbClr val="142B43"/>
                 </a:solidFill>
                 <a:latin typeface="Microsoft YaHei"/>
               </a:rPr>
-              <a:t>FAQ</a:t>
-            </a:r>
-          </a:p>
-        </p:txBody>
-      </p:sp>
-      <p:sp>
-        <p:nvSpPr>
-          <p:cNvPr id="11" name="TextBox 10"/>
-          <p:cNvSpPr txBox="1"/>
-          <p:nvPr/>
-        </p:nvSpPr>
-        <p:spPr>
-          <a:xfrm>
-            <a:off x="6903720" y="2423160"/>
-            <a:ext cx="1463040" cy="457200"/>
-          </a:xfrm>
-          <a:prstGeom prst="rect">
-            <a:avLst/>
-          </a:prstGeom>
-          <a:noFill/>
-        </p:spPr>
-        <p:txBody>
-          <a:bodyPr wrap="square" anchor="t">
-            <a:spAutoFit/>
-          </a:bodyPr>
-          <a:lstStyle/>
-          <a:p>
-            <a:pPr algn="ctr"/>
-            <a:r>
-              <a:rPr sz="1400" b="0">
-                <a:solidFill>
-                  <a:srgbClr val="26343F"/>
-                </a:solidFill>
-                <a:latin typeface="Microsoft YaHei"/>
-              </a:rPr>
-              <a:t>????????</a:t>
-            </a:r>
-          </a:p>
-        </p:txBody>
-      </p:sp>
-      <p:sp>
-        <p:nvSpPr>
-          <p:cNvPr id="12" name="TextBox 11"/>
-          <p:cNvSpPr txBox="1"/>
-          <p:nvPr/>
-        </p:nvSpPr>
-        <p:spPr>
-          <a:xfrm>
-            <a:off x="9528048" y="1828800"/>
-            <a:ext cx="1325880" cy="411480"/>
-          </a:xfrm>
-          <a:prstGeom prst="rect">
-            <a:avLst/>
-          </a:prstGeom>
-          <a:noFill/>
-        </p:spPr>
-        <p:txBody>
-          <a:bodyPr wrap="square" anchor="t">
-            <a:spAutoFit/>
-          </a:bodyPr>
-          <a:lstStyle/>
-          <a:p>
-            <a:pPr algn="ctr"/>
-            <a:r>
-              <a:rPr sz="2600" b="1">
-                <a:solidFill>
-                  <a:srgbClr val="409669"/>
-                </a:solidFill>
-                <a:latin typeface="Microsoft YaHei"/>
-              </a:rPr>
-              <a:t>RAG</a:t>
-            </a:r>
-          </a:p>
-        </p:txBody>
-      </p:sp>
-      <p:sp>
-        <p:nvSpPr>
-          <p:cNvPr id="13" name="TextBox 12"/>
-          <p:cNvSpPr txBox="1"/>
-          <p:nvPr/>
-        </p:nvSpPr>
-        <p:spPr>
-          <a:xfrm>
-            <a:off x="9445752" y="2423160"/>
-            <a:ext cx="1508760" cy="457200"/>
-          </a:xfrm>
-          <a:prstGeom prst="rect">
-            <a:avLst/>
-          </a:prstGeom>
-          <a:noFill/>
-        </p:spPr>
-        <p:txBody>
-          <a:bodyPr wrap="square" anchor="t">
-            <a:spAutoFit/>
-          </a:bodyPr>
-          <a:lstStyle/>
-          <a:p>
-            <a:pPr algn="ctr"/>
-            <a:r>
-              <a:rPr sz="1400" b="0">
-                <a:solidFill>
-                  <a:srgbClr val="26343F"/>
-                </a:solidFill>
-                <a:latin typeface="Microsoft YaHei"/>
-              </a:rPr>
-              <a:t>????????</a:t>
-            </a:r>
-          </a:p>
-        </p:txBody>
-      </p:sp>
-      <p:sp>
-        <p:nvSpPr>
-          <p:cNvPr id="14" name="Down Arrow 13"/>
+              <a:t>演示动作</a:t>
+            </a:r>
+          </a:p>
+        </p:txBody>
+      </p:sp>
+      <p:sp>
+        <p:nvSpPr>
+          <p:cNvPr id="9" name="Oval 8"/>
           <p:cNvSpPr/>
           <p:nvPr/>
         </p:nvSpPr>
         <p:spPr>
           <a:xfrm>
-            <a:off x="8092440" y="4434840"/>
-            <a:ext cx="1691640" cy="457200"/>
-          </a:xfrm>
-          <a:prstGeom prst="downArrow">
+            <a:off x="6958584" y="2286000"/>
+            <a:ext cx="146304" cy="146304"/>
+          </a:xfrm>
+          <a:prstGeom prst="ellipse">
             <a:avLst/>
           </a:prstGeom>
           <a:solidFill>
@@ -10024,14 +8056,14 @@
       </p:sp>
       <p:sp>
         <p:nvSpPr>
-          <p:cNvPr id="15" name="TextBox 14"/>
+          <p:cNvPr id="10" name="TextBox 9"/>
           <p:cNvSpPr txBox="1"/>
           <p:nvPr/>
         </p:nvSpPr>
         <p:spPr>
           <a:xfrm>
-            <a:off x="7543800" y="5074920"/>
-            <a:ext cx="2743200" cy="320040"/>
+            <a:off x="7223760" y="2221992"/>
+            <a:ext cx="3794760" cy="411480"/>
           </a:xfrm>
           <a:prstGeom prst="rect">
             <a:avLst/>
@@ -10044,15 +8076,249 @@
           </a:bodyPr>
           <a:lstStyle/>
           <a:p>
+            <a:pPr algn="l"/>
+            <a:r>
+              <a:rPr sz="1250" b="0">
+                <a:solidFill>
+                  <a:srgbClr val="26343F"/>
+                </a:solidFill>
+                <a:latin typeface="Microsoft YaHei"/>
+              </a:rPr>
+              <a:t>进入 /knowledge</a:t>
+            </a:r>
+          </a:p>
+        </p:txBody>
+      </p:sp>
+      <p:sp>
+        <p:nvSpPr>
+          <p:cNvPr id="11" name="Oval 10"/>
+          <p:cNvSpPr/>
+          <p:nvPr/>
+        </p:nvSpPr>
+        <p:spPr>
+          <a:xfrm>
+            <a:off x="6958584" y="2944368"/>
+            <a:ext cx="146304" cy="146304"/>
+          </a:xfrm>
+          <a:prstGeom prst="ellipse">
+            <a:avLst/>
+          </a:prstGeom>
+          <a:solidFill>
+            <a:srgbClr val="EC8B40"/>
+          </a:solidFill>
+          <a:ln>
+            <a:noFill/>
+          </a:ln>
+        </p:spPr>
+        <p:style>
+          <a:lnRef idx="1">
+            <a:schemeClr val="accent1"/>
+          </a:lnRef>
+          <a:fillRef idx="3">
+            <a:schemeClr val="accent1"/>
+          </a:fillRef>
+          <a:effectRef idx="2">
+            <a:schemeClr val="accent1"/>
+          </a:effectRef>
+          <a:fontRef idx="minor">
+            <a:schemeClr val="lt1"/>
+          </a:fontRef>
+        </p:style>
+        <p:txBody>
+          <a:bodyPr rtlCol="0" anchor="ctr"/>
+          <a:lstStyle/>
+          <a:p>
             <a:pPr algn="ctr"/>
-            <a:r>
-              <a:rPr sz="1400" b="1">
-                <a:solidFill>
-                  <a:srgbClr val="142B43"/>
+          </a:p>
+        </p:txBody>
+      </p:sp>
+      <p:sp>
+        <p:nvSpPr>
+          <p:cNvPr id="12" name="TextBox 11"/>
+          <p:cNvSpPr txBox="1"/>
+          <p:nvPr/>
+        </p:nvSpPr>
+        <p:spPr>
+          <a:xfrm>
+            <a:off x="7223760" y="2880360"/>
+            <a:ext cx="3794760" cy="411480"/>
+          </a:xfrm>
+          <a:prstGeom prst="rect">
+            <a:avLst/>
+          </a:prstGeom>
+          <a:noFill/>
+        </p:spPr>
+        <p:txBody>
+          <a:bodyPr wrap="square" anchor="t">
+            <a:spAutoFit/>
+          </a:bodyPr>
+          <a:lstStyle/>
+          <a:p>
+            <a:pPr algn="l"/>
+            <a:r>
+              <a:rPr sz="1250" b="0">
+                <a:solidFill>
+                  <a:srgbClr val="26343F"/>
                 </a:solidFill>
                 <a:latin typeface="Microsoft YaHei"/>
               </a:rPr>
-              <a:t>??????</a:t>
+              <a:t>选择知识源</a:t>
+            </a:r>
+          </a:p>
+        </p:txBody>
+      </p:sp>
+      <p:sp>
+        <p:nvSpPr>
+          <p:cNvPr id="13" name="Oval 12"/>
+          <p:cNvSpPr/>
+          <p:nvPr/>
+        </p:nvSpPr>
+        <p:spPr>
+          <a:xfrm>
+            <a:off x="6958584" y="3602736"/>
+            <a:ext cx="146304" cy="146304"/>
+          </a:xfrm>
+          <a:prstGeom prst="ellipse">
+            <a:avLst/>
+          </a:prstGeom>
+          <a:solidFill>
+            <a:srgbClr val="EC8B40"/>
+          </a:solidFill>
+          <a:ln>
+            <a:noFill/>
+          </a:ln>
+        </p:spPr>
+        <p:style>
+          <a:lnRef idx="1">
+            <a:schemeClr val="accent1"/>
+          </a:lnRef>
+          <a:fillRef idx="3">
+            <a:schemeClr val="accent1"/>
+          </a:fillRef>
+          <a:effectRef idx="2">
+            <a:schemeClr val="accent1"/>
+          </a:effectRef>
+          <a:fontRef idx="minor">
+            <a:schemeClr val="lt1"/>
+          </a:fontRef>
+        </p:style>
+        <p:txBody>
+          <a:bodyPr rtlCol="0" anchor="ctr"/>
+          <a:lstStyle/>
+          <a:p>
+            <a:pPr algn="ctr"/>
+          </a:p>
+        </p:txBody>
+      </p:sp>
+      <p:sp>
+        <p:nvSpPr>
+          <p:cNvPr id="14" name="TextBox 13"/>
+          <p:cNvSpPr txBox="1"/>
+          <p:nvPr/>
+        </p:nvSpPr>
+        <p:spPr>
+          <a:xfrm>
+            <a:off x="7223760" y="3538728"/>
+            <a:ext cx="3794760" cy="411480"/>
+          </a:xfrm>
+          <a:prstGeom prst="rect">
+            <a:avLst/>
+          </a:prstGeom>
+          <a:noFill/>
+        </p:spPr>
+        <p:txBody>
+          <a:bodyPr wrap="square" anchor="t">
+            <a:spAutoFit/>
+          </a:bodyPr>
+          <a:lstStyle/>
+          <a:p>
+            <a:pPr algn="l"/>
+            <a:r>
+              <a:rPr sz="1250" b="0">
+                <a:solidFill>
+                  <a:srgbClr val="26343F"/>
+                </a:solidFill>
+                <a:latin typeface="Microsoft YaHei"/>
+              </a:rPr>
+              <a:t>上传一个演示文档</a:t>
+            </a:r>
+          </a:p>
+        </p:txBody>
+      </p:sp>
+      <p:sp>
+        <p:nvSpPr>
+          <p:cNvPr id="15" name="Oval 14"/>
+          <p:cNvSpPr/>
+          <p:nvPr/>
+        </p:nvSpPr>
+        <p:spPr>
+          <a:xfrm>
+            <a:off x="6958584" y="4261104"/>
+            <a:ext cx="146304" cy="146304"/>
+          </a:xfrm>
+          <a:prstGeom prst="ellipse">
+            <a:avLst/>
+          </a:prstGeom>
+          <a:solidFill>
+            <a:srgbClr val="EC8B40"/>
+          </a:solidFill>
+          <a:ln>
+            <a:noFill/>
+          </a:ln>
+        </p:spPr>
+        <p:style>
+          <a:lnRef idx="1">
+            <a:schemeClr val="accent1"/>
+          </a:lnRef>
+          <a:fillRef idx="3">
+            <a:schemeClr val="accent1"/>
+          </a:fillRef>
+          <a:effectRef idx="2">
+            <a:schemeClr val="accent1"/>
+          </a:effectRef>
+          <a:fontRef idx="minor">
+            <a:schemeClr val="lt1"/>
+          </a:fontRef>
+        </p:style>
+        <p:txBody>
+          <a:bodyPr rtlCol="0" anchor="ctr"/>
+          <a:lstStyle/>
+          <a:p>
+            <a:pPr algn="ctr"/>
+          </a:p>
+        </p:txBody>
+      </p:sp>
+      <p:sp>
+        <p:nvSpPr>
+          <p:cNvPr id="16" name="TextBox 15"/>
+          <p:cNvSpPr txBox="1"/>
+          <p:nvPr/>
+        </p:nvSpPr>
+        <p:spPr>
+          <a:xfrm>
+            <a:off x="7223760" y="4197096"/>
+            <a:ext cx="3794760" cy="411480"/>
+          </a:xfrm>
+          <a:prstGeom prst="rect">
+            <a:avLst/>
+          </a:prstGeom>
+          <a:noFill/>
+        </p:spPr>
+        <p:txBody>
+          <a:bodyPr wrap="square" anchor="t">
+            <a:spAutoFit/>
+          </a:bodyPr>
+          <a:lstStyle/>
+          <a:p>
+            <a:pPr algn="l"/>
+            <a:r>
+              <a:rPr sz="1250" b="0">
+                <a:solidFill>
+                  <a:srgbClr val="26343F"/>
+                </a:solidFill>
+                <a:latin typeface="Microsoft YaHei"/>
+              </a:rPr>
+              <a:t>查看上传进度和结果</a:t>
             </a:r>
           </a:p>
         </p:txBody>
@@ -10177,8 +8443,8 @@
         </p:nvSpPr>
         <p:spPr>
           <a:xfrm>
-            <a:off x="594360" y="502920"/>
-            <a:ext cx="8138160" cy="438912"/>
+            <a:off x="594360" y="512064"/>
+            <a:ext cx="8595360" cy="438912"/>
           </a:xfrm>
           <a:prstGeom prst="rect">
             <a:avLst/>
@@ -10199,7 +8465,7 @@
                 </a:solidFill>
                 <a:latin typeface="Microsoft YaHei"/>
               </a:rPr>
-              <a:t>???????</a:t>
+              <a:t>资料更新后如何让问答生效</a:t>
             </a:r>
           </a:p>
         </p:txBody>
@@ -10212,8 +8478,8 @@
         </p:nvSpPr>
         <p:spPr>
           <a:xfrm>
-            <a:off x="612648" y="950976"/>
-            <a:ext cx="8046720" cy="292608"/>
+            <a:off x="11018520" y="512064"/>
+            <a:ext cx="685800" cy="320040"/>
           </a:xfrm>
           <a:prstGeom prst="rect">
             <a:avLst/>
@@ -10226,15 +8492,15 @@
           </a:bodyPr>
           <a:lstStyle/>
           <a:p>
-            <a:pPr algn="l"/>
-            <a:r>
-              <a:rPr sz="1250" b="0">
+            <a:pPr algn="r"/>
+            <a:r>
+              <a:rPr sz="1400" b="1">
                 <a:solidFill>
                   <a:srgbClr val="657684"/>
                 </a:solidFill>
                 <a:latin typeface="Microsoft YaHei"/>
               </a:rPr>
-              <a:t>???????????</a:t>
+              <a:t>08</a:t>
             </a:r>
           </a:p>
         </p:txBody>
@@ -10247,43 +8513,8 @@
         </p:nvSpPr>
         <p:spPr>
           <a:xfrm>
-            <a:off x="11018520" y="502920"/>
-            <a:ext cx="685800" cy="320040"/>
-          </a:xfrm>
-          <a:prstGeom prst="rect">
-            <a:avLst/>
-          </a:prstGeom>
-          <a:noFill/>
-        </p:spPr>
-        <p:txBody>
-          <a:bodyPr wrap="square" anchor="t">
-            <a:spAutoFit/>
-          </a:bodyPr>
-          <a:lstStyle/>
-          <a:p>
-            <a:pPr algn="r"/>
-            <a:r>
-              <a:rPr sz="1400" b="1">
-                <a:solidFill>
-                  <a:srgbClr val="657684"/>
-                </a:solidFill>
-                <a:latin typeface="Microsoft YaHei"/>
-              </a:rPr>
-              <a:t>08</a:t>
-            </a:r>
-          </a:p>
-        </p:txBody>
-      </p:sp>
-      <p:sp>
-        <p:nvSpPr>
-          <p:cNvPr id="7" name="TextBox 6"/>
-          <p:cNvSpPr txBox="1"/>
-          <p:nvPr/>
-        </p:nvSpPr>
-        <p:spPr>
-          <a:xfrm>
-            <a:off x="713232" y="1481328"/>
-            <a:ext cx="5532120" cy="4297680"/>
+            <a:off x="713232" y="1417320"/>
+            <a:ext cx="5532120" cy="4389120"/>
           </a:xfrm>
           <a:prstGeom prst="rect">
             <a:avLst/>
@@ -10308,7 +8539,7 @@
               </a:defRPr>
             </a:pPr>
             <a:r>
-              <a:t>?????Markdown?HTML?PDF?Word?PPT ?????</a:t>
+              <a:t>知识源用于区分不同业务资料范围</a:t>
             </a:r>
           </a:p>
           <a:p>
@@ -10324,7 +8555,7 @@
               </a:defRPr>
             </a:pPr>
             <a:r>
-              <a:t>???????????</a:t>
+              <a:t>管理员可以查看和维护知识源</a:t>
             </a:r>
           </a:p>
           <a:p>
@@ -10340,7 +8571,7 @@
               </a:defRPr>
             </a:pPr>
             <a:r>
-              <a:t>?????????????</a:t>
+              <a:t>当资料批量更新时，可以对指定知识源重建索引</a:t>
             </a:r>
           </a:p>
           <a:p>
@@ -10356,7 +8587,7 @@
               </a:defRPr>
             </a:pPr>
             <a:r>
-              <a:t>??????????????</a:t>
+              <a:t>重建索引会影响问答结果，应由管理员谨慎操作</a:t>
             </a:r>
           </a:p>
           <a:p>
@@ -10372,20 +8603,20 @@
               </a:defRPr>
             </a:pPr>
             <a:r>
-              <a:t>????????????????????</a:t>
-            </a:r>
-          </a:p>
-        </p:txBody>
-      </p:sp>
-      <p:sp>
-        <p:nvSpPr>
-          <p:cNvPr id="8" name="Rounded Rectangle 7"/>
+              <a:t>系统限制重建目录范围，降低误操作风险</a:t>
+            </a:r>
+          </a:p>
+        </p:txBody>
+      </p:sp>
+      <p:sp>
+        <p:nvSpPr>
+          <p:cNvPr id="7" name="Rounded Rectangle 6"/>
           <p:cNvSpPr/>
           <p:nvPr/>
         </p:nvSpPr>
         <p:spPr>
           <a:xfrm>
-            <a:off x="6629400" y="1481328"/>
+            <a:off x="6629400" y="1417320"/>
             <a:ext cx="4709160" cy="4389120"/>
           </a:xfrm>
           <a:prstGeom prst="roundRect">
@@ -10424,13 +8655,13 @@
       </p:sp>
       <p:sp>
         <p:nvSpPr>
-          <p:cNvPr id="9" name="TextBox 8"/>
+          <p:cNvPr id="8" name="TextBox 7"/>
           <p:cNvSpPr txBox="1"/>
           <p:nvPr/>
         </p:nvSpPr>
         <p:spPr>
           <a:xfrm>
-            <a:off x="6949440" y="1773936"/>
+            <a:off x="6949440" y="1709928"/>
             <a:ext cx="4069080" cy="310896"/>
           </a:xfrm>
           <a:prstGeom prst="rect">
@@ -10452,20 +8683,20 @@
                 </a:solidFill>
                 <a:latin typeface="Microsoft YaHei"/>
               </a:rPr>
-              <a:t>????</a:t>
-            </a:r>
-          </a:p>
-        </p:txBody>
-      </p:sp>
-      <p:sp>
-        <p:nvSpPr>
-          <p:cNvPr id="10" name="Oval 9"/>
+              <a:t>演示动作</a:t>
+            </a:r>
+          </a:p>
+        </p:txBody>
+      </p:sp>
+      <p:sp>
+        <p:nvSpPr>
+          <p:cNvPr id="9" name="Oval 8"/>
           <p:cNvSpPr/>
           <p:nvPr/>
         </p:nvSpPr>
         <p:spPr>
           <a:xfrm>
-            <a:off x="6958584" y="2350008"/>
+            <a:off x="6958584" y="2286000"/>
             <a:ext cx="146304" cy="146304"/>
           </a:xfrm>
           <a:prstGeom prst="ellipse">
@@ -10502,13 +8733,13 @@
       </p:sp>
       <p:sp>
         <p:nvSpPr>
-          <p:cNvPr id="11" name="TextBox 10"/>
+          <p:cNvPr id="10" name="TextBox 9"/>
           <p:cNvSpPr txBox="1"/>
           <p:nvPr/>
         </p:nvSpPr>
         <p:spPr>
           <a:xfrm>
-            <a:off x="7223760" y="2286000"/>
+            <a:off x="7223760" y="2221992"/>
             <a:ext cx="3794760" cy="411480"/>
           </a:xfrm>
           <a:prstGeom prst="rect">
@@ -10530,20 +8761,20 @@
                 </a:solidFill>
                 <a:latin typeface="Microsoft YaHei"/>
               </a:rPr>
-              <a:t>?? /knowledge</a:t>
-            </a:r>
-          </a:p>
-        </p:txBody>
-      </p:sp>
-      <p:sp>
-        <p:nvSpPr>
-          <p:cNvPr id="12" name="Oval 11"/>
+              <a:t>进入 /knowledge/sources</a:t>
+            </a:r>
+          </a:p>
+        </p:txBody>
+      </p:sp>
+      <p:sp>
+        <p:nvSpPr>
+          <p:cNvPr id="11" name="Oval 10"/>
           <p:cNvSpPr/>
           <p:nvPr/>
         </p:nvSpPr>
         <p:spPr>
           <a:xfrm>
-            <a:off x="6958584" y="3008376"/>
+            <a:off x="6958584" y="2944368"/>
             <a:ext cx="146304" cy="146304"/>
           </a:xfrm>
           <a:prstGeom prst="ellipse">
@@ -10580,13 +8811,13 @@
       </p:sp>
       <p:sp>
         <p:nvSpPr>
-          <p:cNvPr id="13" name="TextBox 12"/>
+          <p:cNvPr id="12" name="TextBox 11"/>
           <p:cNvSpPr txBox="1"/>
           <p:nvPr/>
         </p:nvSpPr>
         <p:spPr>
           <a:xfrm>
-            <a:off x="7223760" y="2944368"/>
+            <a:off x="7223760" y="2880360"/>
             <a:ext cx="3794760" cy="411480"/>
           </a:xfrm>
           <a:prstGeom prst="rect">
@@ -10608,20 +8839,20 @@
                 </a:solidFill>
                 <a:latin typeface="Microsoft YaHei"/>
               </a:rPr>
-              <a:t>?????</a:t>
-            </a:r>
-          </a:p>
-        </p:txBody>
-      </p:sp>
-      <p:sp>
-        <p:nvSpPr>
-          <p:cNvPr id="14" name="Oval 13"/>
+              <a:t>展示知识源列表</a:t>
+            </a:r>
+          </a:p>
+        </p:txBody>
+      </p:sp>
+      <p:sp>
+        <p:nvSpPr>
+          <p:cNvPr id="13" name="Oval 12"/>
           <p:cNvSpPr/>
           <p:nvPr/>
         </p:nvSpPr>
         <p:spPr>
           <a:xfrm>
-            <a:off x="6958584" y="3666744"/>
+            <a:off x="6958584" y="3602736"/>
             <a:ext cx="146304" cy="146304"/>
           </a:xfrm>
           <a:prstGeom prst="ellipse">
@@ -10658,13 +8889,13 @@
       </p:sp>
       <p:sp>
         <p:nvSpPr>
-          <p:cNvPr id="15" name="TextBox 14"/>
+          <p:cNvPr id="14" name="TextBox 13"/>
           <p:cNvSpPr txBox="1"/>
           <p:nvPr/>
         </p:nvSpPr>
         <p:spPr>
           <a:xfrm>
-            <a:off x="7223760" y="3602736"/>
+            <a:off x="7223760" y="3538728"/>
             <a:ext cx="3794760" cy="411480"/>
           </a:xfrm>
           <a:prstGeom prst="rect">
@@ -10686,20 +8917,20 @@
                 </a:solidFill>
                 <a:latin typeface="Microsoft YaHei"/>
               </a:rPr>
-              <a:t>??????</a:t>
-            </a:r>
-          </a:p>
-        </p:txBody>
-      </p:sp>
-      <p:sp>
-        <p:nvSpPr>
-          <p:cNvPr id="16" name="Oval 15"/>
+              <a:t>进入 /knowledge/reindex</a:t>
+            </a:r>
+          </a:p>
+        </p:txBody>
+      </p:sp>
+      <p:sp>
+        <p:nvSpPr>
+          <p:cNvPr id="15" name="Oval 14"/>
           <p:cNvSpPr/>
           <p:nvPr/>
         </p:nvSpPr>
         <p:spPr>
           <a:xfrm>
-            <a:off x="6958584" y="4325112"/>
+            <a:off x="6958584" y="4261104"/>
             <a:ext cx="146304" cy="146304"/>
           </a:xfrm>
           <a:prstGeom prst="ellipse">
@@ -10736,13 +8967,13 @@
       </p:sp>
       <p:sp>
         <p:nvSpPr>
-          <p:cNvPr id="17" name="TextBox 16"/>
+          <p:cNvPr id="16" name="TextBox 15"/>
           <p:cNvSpPr txBox="1"/>
           <p:nvPr/>
         </p:nvSpPr>
         <p:spPr>
           <a:xfrm>
-            <a:off x="7223760" y="4261104"/>
+            <a:off x="7223760" y="4197096"/>
             <a:ext cx="3794760" cy="411480"/>
           </a:xfrm>
           <a:prstGeom prst="rect">
@@ -10764,7 +8995,7 @@
                 </a:solidFill>
                 <a:latin typeface="Microsoft YaHei"/>
               </a:rPr>
-              <a:t>???????</a:t>
+              <a:t>说明 append 和 replace 的区别</a:t>
             </a:r>
           </a:p>
         </p:txBody>
@@ -10889,8 +9120,8 @@
         </p:nvSpPr>
         <p:spPr>
           <a:xfrm>
-            <a:off x="594360" y="502920"/>
-            <a:ext cx="8138160" cy="438912"/>
+            <a:off x="594360" y="512064"/>
+            <a:ext cx="8595360" cy="438912"/>
           </a:xfrm>
           <a:prstGeom prst="rect">
             <a:avLst/>
@@ -10911,7 +9142,7 @@
                 </a:solidFill>
                 <a:latin typeface="Microsoft YaHei"/>
               </a:rPr>
-              <a:t>????????</a:t>
+              <a:t>知识可用，也要可控</a:t>
             </a:r>
           </a:p>
         </p:txBody>
@@ -10924,8 +9155,8 @@
         </p:nvSpPr>
         <p:spPr>
           <a:xfrm>
-            <a:off x="612648" y="950976"/>
-            <a:ext cx="8046720" cy="292608"/>
+            <a:off x="11018520" y="512064"/>
+            <a:ext cx="685800" cy="320040"/>
           </a:xfrm>
           <a:prstGeom prst="rect">
             <a:avLst/>
@@ -10938,15 +9169,15 @@
           </a:bodyPr>
           <a:lstStyle/>
           <a:p>
-            <a:pPr algn="l"/>
-            <a:r>
-              <a:rPr sz="1250" b="0">
+            <a:pPr algn="r"/>
+            <a:r>
+              <a:rPr sz="1400" b="1">
                 <a:solidFill>
                   <a:srgbClr val="657684"/>
                 </a:solidFill>
                 <a:latin typeface="Microsoft YaHei"/>
               </a:rPr>
-              <a:t>????????????</a:t>
+              <a:t>09</a:t>
             </a:r>
           </a:p>
         </p:txBody>
@@ -10959,43 +9190,8 @@
         </p:nvSpPr>
         <p:spPr>
           <a:xfrm>
-            <a:off x="11018520" y="502920"/>
-            <a:ext cx="685800" cy="320040"/>
-          </a:xfrm>
-          <a:prstGeom prst="rect">
-            <a:avLst/>
-          </a:prstGeom>
-          <a:noFill/>
-        </p:spPr>
-        <p:txBody>
-          <a:bodyPr wrap="square" anchor="t">
-            <a:spAutoFit/>
-          </a:bodyPr>
-          <a:lstStyle/>
-          <a:p>
-            <a:pPr algn="r"/>
-            <a:r>
-              <a:rPr sz="1400" b="1">
-                <a:solidFill>
-                  <a:srgbClr val="657684"/>
-                </a:solidFill>
-                <a:latin typeface="Microsoft YaHei"/>
-              </a:rPr>
-              <a:t>09</a:t>
-            </a:r>
-          </a:p>
-        </p:txBody>
-      </p:sp>
-      <p:sp>
-        <p:nvSpPr>
-          <p:cNvPr id="7" name="TextBox 6"/>
-          <p:cNvSpPr txBox="1"/>
-          <p:nvPr/>
-        </p:nvSpPr>
-        <p:spPr>
-          <a:xfrm>
-            <a:off x="713232" y="1481328"/>
-            <a:ext cx="5532120" cy="4297680"/>
+            <a:off x="713232" y="1417320"/>
+            <a:ext cx="5532120" cy="4389120"/>
           </a:xfrm>
           <a:prstGeom prst="rect">
             <a:avLst/>
@@ -11020,7 +9216,7 @@
               </a:defRPr>
             </a:pPr>
             <a:r>
-              <a:t>???????????????</a:t>
+              <a:t>管理员可以创建、禁用、删除用户</a:t>
             </a:r>
           </a:p>
           <a:p>
@@ -11036,7 +9232,7 @@
               </a:defRPr>
             </a:pPr>
             <a:r>
-              <a:t>?????????????</a:t>
+              <a:t>可以给用户分配可访问的知识源</a:t>
             </a:r>
           </a:p>
           <a:p>
@@ -11052,7 +9248,7 @@
               </a:defRPr>
             </a:pPr>
             <a:r>
-              <a:t>???????????????????</a:t>
+              <a:t>支持组织、菜单角色和安全管理页面</a:t>
             </a:r>
           </a:p>
           <a:p>
@@ -11068,7 +9264,7 @@
               </a:defRPr>
             </a:pPr>
             <a:r>
-              <a:t>?????????????????????</a:t>
+              <a:t>关键操作记录在审计日志中，方便追踪</a:t>
             </a:r>
           </a:p>
           <a:p>
@@ -11084,20 +9280,20 @@
               </a:defRPr>
             </a:pPr>
             <a:r>
-              <a:t>??????????????????</a:t>
-            </a:r>
-          </a:p>
-        </p:txBody>
-      </p:sp>
-      <p:sp>
-        <p:nvSpPr>
-          <p:cNvPr id="8" name="Rounded Rectangle 7"/>
+              <a:t>权限控制覆盖问答、上传、诊断和管理接口</a:t>
+            </a:r>
+          </a:p>
+        </p:txBody>
+      </p:sp>
+      <p:sp>
+        <p:nvSpPr>
+          <p:cNvPr id="7" name="Rounded Rectangle 6"/>
           <p:cNvSpPr/>
           <p:nvPr/>
         </p:nvSpPr>
         <p:spPr>
           <a:xfrm>
-            <a:off x="6629400" y="1481328"/>
+            <a:off x="6629400" y="1417320"/>
             <a:ext cx="4709160" cy="4389120"/>
           </a:xfrm>
           <a:prstGeom prst="roundRect">
@@ -11136,13 +9332,13 @@
       </p:sp>
       <p:sp>
         <p:nvSpPr>
-          <p:cNvPr id="9" name="TextBox 8"/>
+          <p:cNvPr id="8" name="TextBox 7"/>
           <p:cNvSpPr txBox="1"/>
           <p:nvPr/>
         </p:nvSpPr>
         <p:spPr>
           <a:xfrm>
-            <a:off x="6949440" y="1773936"/>
+            <a:off x="6949440" y="1709928"/>
             <a:ext cx="4069080" cy="310896"/>
           </a:xfrm>
           <a:prstGeom prst="rect">
@@ -11164,20 +9360,20 @@
                 </a:solidFill>
                 <a:latin typeface="Microsoft YaHei"/>
               </a:rPr>
-              <a:t>????</a:t>
-            </a:r>
-          </a:p>
-        </p:txBody>
-      </p:sp>
-      <p:sp>
-        <p:nvSpPr>
-          <p:cNvPr id="10" name="Oval 9"/>
+              <a:t>演示动作</a:t>
+            </a:r>
+          </a:p>
+        </p:txBody>
+      </p:sp>
+      <p:sp>
+        <p:nvSpPr>
+          <p:cNvPr id="9" name="Oval 8"/>
           <p:cNvSpPr/>
           <p:nvPr/>
         </p:nvSpPr>
         <p:spPr>
           <a:xfrm>
-            <a:off x="6958584" y="2350008"/>
+            <a:off x="6958584" y="2286000"/>
             <a:ext cx="146304" cy="146304"/>
           </a:xfrm>
           <a:prstGeom prst="ellipse">
@@ -11214,13 +9410,13 @@
       </p:sp>
       <p:sp>
         <p:nvSpPr>
-          <p:cNvPr id="11" name="TextBox 10"/>
+          <p:cNvPr id="10" name="TextBox 9"/>
           <p:cNvSpPr txBox="1"/>
           <p:nvPr/>
         </p:nvSpPr>
         <p:spPr>
           <a:xfrm>
-            <a:off x="7223760" y="2286000"/>
+            <a:off x="7223760" y="2221992"/>
             <a:ext cx="3794760" cy="411480"/>
           </a:xfrm>
           <a:prstGeom prst="rect">
@@ -11242,20 +9438,20 @@
                 </a:solidFill>
                 <a:latin typeface="Microsoft YaHei"/>
               </a:rPr>
-              <a:t>?? /knowledge/sources</a:t>
-            </a:r>
-          </a:p>
-        </p:txBody>
-      </p:sp>
-      <p:sp>
-        <p:nvSpPr>
-          <p:cNvPr id="12" name="Oval 11"/>
+              <a:t>进入 /users</a:t>
+            </a:r>
+          </a:p>
+        </p:txBody>
+      </p:sp>
+      <p:sp>
+        <p:nvSpPr>
+          <p:cNvPr id="11" name="Oval 10"/>
           <p:cNvSpPr/>
           <p:nvPr/>
         </p:nvSpPr>
         <p:spPr>
           <a:xfrm>
-            <a:off x="6958584" y="3008376"/>
+            <a:off x="6958584" y="2944368"/>
             <a:ext cx="146304" cy="146304"/>
           </a:xfrm>
           <a:prstGeom prst="ellipse">
@@ -11292,13 +9488,13 @@
       </p:sp>
       <p:sp>
         <p:nvSpPr>
-          <p:cNvPr id="13" name="TextBox 12"/>
+          <p:cNvPr id="12" name="TextBox 11"/>
           <p:cNvSpPr txBox="1"/>
           <p:nvPr/>
         </p:nvSpPr>
         <p:spPr>
           <a:xfrm>
-            <a:off x="7223760" y="2944368"/>
+            <a:off x="7223760" y="2880360"/>
             <a:ext cx="3794760" cy="411480"/>
           </a:xfrm>
           <a:prstGeom prst="rect">
@@ -11320,20 +9516,20 @@
                 </a:solidFill>
                 <a:latin typeface="Microsoft YaHei"/>
               </a:rPr>
-              <a:t>?? /knowledge/reindex</a:t>
-            </a:r>
-          </a:p>
-        </p:txBody>
-      </p:sp>
-      <p:sp>
-        <p:nvSpPr>
-          <p:cNvPr id="14" name="Oval 13"/>
+              <a:t>展示用户列表</a:t>
+            </a:r>
+          </a:p>
+        </p:txBody>
+      </p:sp>
+      <p:sp>
+        <p:nvSpPr>
+          <p:cNvPr id="13" name="Oval 12"/>
           <p:cNvSpPr/>
           <p:nvPr/>
         </p:nvSpPr>
         <p:spPr>
           <a:xfrm>
-            <a:off x="6958584" y="3666744"/>
+            <a:off x="6958584" y="3602736"/>
             <a:ext cx="146304" cy="146304"/>
           </a:xfrm>
           <a:prstGeom prst="ellipse">
@@ -11370,13 +9566,13 @@
       </p:sp>
       <p:sp>
         <p:nvSpPr>
-          <p:cNvPr id="15" name="TextBox 14"/>
+          <p:cNvPr id="14" name="TextBox 13"/>
           <p:cNvSpPr txBox="1"/>
           <p:nvPr/>
         </p:nvSpPr>
         <p:spPr>
           <a:xfrm>
-            <a:off x="7223760" y="3602736"/>
+            <a:off x="7223760" y="3538728"/>
             <a:ext cx="3794760" cy="411480"/>
           </a:xfrm>
           <a:prstGeom prst="rect">
@@ -11398,7 +9594,163 @@
                 </a:solidFill>
                 <a:latin typeface="Microsoft YaHei"/>
               </a:rPr>
-              <a:t>??????????</a:t>
+              <a:t>进入 /users/access</a:t>
+            </a:r>
+          </a:p>
+        </p:txBody>
+      </p:sp>
+      <p:sp>
+        <p:nvSpPr>
+          <p:cNvPr id="15" name="Oval 14"/>
+          <p:cNvSpPr/>
+          <p:nvPr/>
+        </p:nvSpPr>
+        <p:spPr>
+          <a:xfrm>
+            <a:off x="6958584" y="4261104"/>
+            <a:ext cx="146304" cy="146304"/>
+          </a:xfrm>
+          <a:prstGeom prst="ellipse">
+            <a:avLst/>
+          </a:prstGeom>
+          <a:solidFill>
+            <a:srgbClr val="EC8B40"/>
+          </a:solidFill>
+          <a:ln>
+            <a:noFill/>
+          </a:ln>
+        </p:spPr>
+        <p:style>
+          <a:lnRef idx="1">
+            <a:schemeClr val="accent1"/>
+          </a:lnRef>
+          <a:fillRef idx="3">
+            <a:schemeClr val="accent1"/>
+          </a:fillRef>
+          <a:effectRef idx="2">
+            <a:schemeClr val="accent1"/>
+          </a:effectRef>
+          <a:fontRef idx="minor">
+            <a:schemeClr val="lt1"/>
+          </a:fontRef>
+        </p:style>
+        <p:txBody>
+          <a:bodyPr rtlCol="0" anchor="ctr"/>
+          <a:lstStyle/>
+          <a:p>
+            <a:pPr algn="ctr"/>
+          </a:p>
+        </p:txBody>
+      </p:sp>
+      <p:sp>
+        <p:nvSpPr>
+          <p:cNvPr id="16" name="TextBox 15"/>
+          <p:cNvSpPr txBox="1"/>
+          <p:nvPr/>
+        </p:nvSpPr>
+        <p:spPr>
+          <a:xfrm>
+            <a:off x="7223760" y="4197096"/>
+            <a:ext cx="3794760" cy="411480"/>
+          </a:xfrm>
+          <a:prstGeom prst="rect">
+            <a:avLst/>
+          </a:prstGeom>
+          <a:noFill/>
+        </p:spPr>
+        <p:txBody>
+          <a:bodyPr wrap="square" anchor="t">
+            <a:spAutoFit/>
+          </a:bodyPr>
+          <a:lstStyle/>
+          <a:p>
+            <a:pPr algn="l"/>
+            <a:r>
+              <a:rPr sz="1250" b="0">
+                <a:solidFill>
+                  <a:srgbClr val="26343F"/>
+                </a:solidFill>
+                <a:latin typeface="Microsoft YaHei"/>
+              </a:rPr>
+              <a:t>展示知识源授权</a:t>
+            </a:r>
+          </a:p>
+        </p:txBody>
+      </p:sp>
+      <p:sp>
+        <p:nvSpPr>
+          <p:cNvPr id="17" name="Oval 16"/>
+          <p:cNvSpPr/>
+          <p:nvPr/>
+        </p:nvSpPr>
+        <p:spPr>
+          <a:xfrm>
+            <a:off x="6958584" y="4919472"/>
+            <a:ext cx="146304" cy="146304"/>
+          </a:xfrm>
+          <a:prstGeom prst="ellipse">
+            <a:avLst/>
+          </a:prstGeom>
+          <a:solidFill>
+            <a:srgbClr val="EC8B40"/>
+          </a:solidFill>
+          <a:ln>
+            <a:noFill/>
+          </a:ln>
+        </p:spPr>
+        <p:style>
+          <a:lnRef idx="1">
+            <a:schemeClr val="accent1"/>
+          </a:lnRef>
+          <a:fillRef idx="3">
+            <a:schemeClr val="accent1"/>
+          </a:fillRef>
+          <a:effectRef idx="2">
+            <a:schemeClr val="accent1"/>
+          </a:effectRef>
+          <a:fontRef idx="minor">
+            <a:schemeClr val="lt1"/>
+          </a:fontRef>
+        </p:style>
+        <p:txBody>
+          <a:bodyPr rtlCol="0" anchor="ctr"/>
+          <a:lstStyle/>
+          <a:p>
+            <a:pPr algn="ctr"/>
+          </a:p>
+        </p:txBody>
+      </p:sp>
+      <p:sp>
+        <p:nvSpPr>
+          <p:cNvPr id="18" name="TextBox 17"/>
+          <p:cNvSpPr txBox="1"/>
+          <p:nvPr/>
+        </p:nvSpPr>
+        <p:spPr>
+          <a:xfrm>
+            <a:off x="7223760" y="4855464"/>
+            <a:ext cx="3794760" cy="411480"/>
+          </a:xfrm>
+          <a:prstGeom prst="rect">
+            <a:avLst/>
+          </a:prstGeom>
+          <a:noFill/>
+        </p:spPr>
+        <p:txBody>
+          <a:bodyPr wrap="square" anchor="t">
+            <a:spAutoFit/>
+          </a:bodyPr>
+          <a:lstStyle/>
+          <a:p>
+            <a:pPr algn="l"/>
+            <a:r>
+              <a:rPr sz="1250" b="0">
+                <a:solidFill>
+                  <a:srgbClr val="26343F"/>
+                </a:solidFill>
+                <a:latin typeface="Microsoft YaHei"/>
+              </a:rPr>
+              <a:t>进入 /users/audit</a:t>
             </a:r>
           </a:p>
         </p:txBody>
